--- a/Templates/cpp_templates_with_diagrams.pptx
+++ b/Templates/cpp_templates_with_diagrams.pptx
@@ -5,25 +5,23 @@
     <p:sldMasterId id="2147483648" r:id="rId1"/>
   </p:sldMasterIdLst>
   <p:notesMasterIdLst>
-    <p:notesMasterId r:id="rId18"/>
+    <p:notesMasterId r:id="rId16"/>
   </p:notesMasterIdLst>
   <p:sldIdLst>
     <p:sldId id="266" r:id="rId2"/>
     <p:sldId id="256" r:id="rId3"/>
     <p:sldId id="267" r:id="rId4"/>
-    <p:sldId id="257" r:id="rId5"/>
-    <p:sldId id="258" r:id="rId6"/>
-    <p:sldId id="275" r:id="rId7"/>
-    <p:sldId id="276" r:id="rId8"/>
+    <p:sldId id="276" r:id="rId5"/>
+    <p:sldId id="257" r:id="rId6"/>
+    <p:sldId id="258" r:id="rId7"/>
+    <p:sldId id="275" r:id="rId8"/>
     <p:sldId id="268" r:id="rId9"/>
-    <p:sldId id="270" r:id="rId10"/>
-    <p:sldId id="271" r:id="rId11"/>
-    <p:sldId id="259" r:id="rId12"/>
-    <p:sldId id="277" r:id="rId13"/>
-    <p:sldId id="278" r:id="rId14"/>
-    <p:sldId id="262" r:id="rId15"/>
-    <p:sldId id="274" r:id="rId16"/>
-    <p:sldId id="265" r:id="rId17"/>
+    <p:sldId id="259" r:id="rId10"/>
+    <p:sldId id="277" r:id="rId11"/>
+    <p:sldId id="278" r:id="rId12"/>
+    <p:sldId id="262" r:id="rId13"/>
+    <p:sldId id="274" r:id="rId14"/>
+    <p:sldId id="265" r:id="rId15"/>
   </p:sldIdLst>
   <p:sldSz cx="9144000" cy="6858000" type="screen4x3"/>
   <p:notesSz cx="6858000" cy="9144000"/>
@@ -223,7 +221,7 @@
           <a:p>
             <a:fld id="{F2EDED6C-E0FD-4738-875B-E7235D4F4E14}" type="datetimeFigureOut">
               <a:rPr lang="en-IN" smtClean="0"/>
-              <a:t>19-07-2025</a:t>
+              <a:t>09-08-2025</a:t>
             </a:fld>
             <a:endParaRPr lang="en-IN"/>
           </a:p>
@@ -556,6 +554,90 @@
           <a:p>
             <a:fld id="{B6C53B9F-9D8D-4783-8DFE-6A40986B63BD}" type="slidenum">
               <a:rPr lang="en-IN" smtClean="0"/>
+              <a:t>1</a:t>
+            </a:fld>
+            <a:endParaRPr lang="en-IN"/>
+          </a:p>
+        </p:txBody>
+      </p:sp>
+    </p:spTree>
+    <p:extLst>
+      <p:ext uri="{BB962C8B-B14F-4D97-AF65-F5344CB8AC3E}">
+        <p14:creationId xmlns:p14="http://schemas.microsoft.com/office/powerpoint/2010/main" val="3098735312"/>
+      </p:ext>
+    </p:extLst>
+  </p:cSld>
+  <p:clrMapOvr>
+    <a:masterClrMapping/>
+  </p:clrMapOvr>
+</p:notes>
+</file>
+
+<file path=ppt/notesSlides/notesSlide2.xml><?xml version="1.0" encoding="utf-8"?>
+<p:notes xmlns:a="http://schemas.openxmlformats.org/drawingml/2006/main" xmlns:r="http://schemas.openxmlformats.org/officeDocument/2006/relationships" xmlns:p="http://schemas.openxmlformats.org/presentationml/2006/main">
+  <p:cSld>
+    <p:spTree>
+      <p:nvGrpSpPr>
+        <p:cNvPr id="1" name=""/>
+        <p:cNvGrpSpPr/>
+        <p:nvPr/>
+      </p:nvGrpSpPr>
+      <p:grpSpPr>
+        <a:xfrm>
+          <a:off x="0" y="0"/>
+          <a:ext cx="0" cy="0"/>
+          <a:chOff x="0" y="0"/>
+          <a:chExt cx="0" cy="0"/>
+        </a:xfrm>
+      </p:grpSpPr>
+      <p:sp>
+        <p:nvSpPr>
+          <p:cNvPr id="2" name="Slide Image Placeholder 1"/>
+          <p:cNvSpPr>
+            <a:spLocks noGrp="1" noRot="1" noChangeAspect="1"/>
+          </p:cNvSpPr>
+          <p:nvPr>
+            <p:ph type="sldImg"/>
+          </p:nvPr>
+        </p:nvSpPr>
+        <p:spPr/>
+      </p:sp>
+      <p:sp>
+        <p:nvSpPr>
+          <p:cNvPr id="3" name="Notes Placeholder 2"/>
+          <p:cNvSpPr>
+            <a:spLocks noGrp="1"/>
+          </p:cNvSpPr>
+          <p:nvPr>
+            <p:ph type="body" idx="1"/>
+          </p:nvPr>
+        </p:nvSpPr>
+        <p:spPr/>
+        <p:txBody>
+          <a:bodyPr/>
+          <a:lstStyle/>
+          <a:p>
+            <a:endParaRPr lang="en-IN" dirty="0"/>
+          </a:p>
+        </p:txBody>
+      </p:sp>
+      <p:sp>
+        <p:nvSpPr>
+          <p:cNvPr id="4" name="Slide Number Placeholder 3"/>
+          <p:cNvSpPr>
+            <a:spLocks noGrp="1"/>
+          </p:cNvSpPr>
+          <p:nvPr>
+            <p:ph type="sldNum" sz="quarter" idx="5"/>
+          </p:nvPr>
+        </p:nvSpPr>
+        <p:spPr/>
+        <p:txBody>
+          <a:bodyPr/>
+          <a:lstStyle/>
+          <a:p>
+            <a:fld id="{B6C53B9F-9D8D-4783-8DFE-6A40986B63BD}" type="slidenum">
+              <a:rPr lang="en-IN" smtClean="0"/>
               <a:t>2</a:t>
             </a:fld>
             <a:endParaRPr lang="en-IN"/>
@@ -575,7 +657,7 @@
 </p:notes>
 </file>
 
-<file path=ppt/notesSlides/notesSlide2.xml><?xml version="1.0" encoding="utf-8"?>
+<file path=ppt/notesSlides/notesSlide3.xml><?xml version="1.0" encoding="utf-8"?>
 <p:notes xmlns:a="http://schemas.openxmlformats.org/drawingml/2006/main" xmlns:r="http://schemas.openxmlformats.org/officeDocument/2006/relationships" xmlns:p="http://schemas.openxmlformats.org/presentationml/2006/main">
   <p:cSld>
     <p:spTree>
@@ -683,7 +765,7 @@
 </p:notes>
 </file>
 
-<file path=ppt/notesSlides/notesSlide3.xml><?xml version="1.0" encoding="utf-8"?>
+<file path=ppt/notesSlides/notesSlide4.xml><?xml version="1.0" encoding="utf-8"?>
 <p:notes xmlns:a="http://schemas.openxmlformats.org/drawingml/2006/main" xmlns:r="http://schemas.openxmlformats.org/officeDocument/2006/relationships" xmlns:p="http://schemas.openxmlformats.org/presentationml/2006/main">
   <p:cSld>
     <p:spTree>
@@ -828,7 +910,7 @@
           <a:p>
             <a:fld id="{B6C53B9F-9D8D-4783-8DFE-6A40986B63BD}" type="slidenum">
               <a:rPr lang="en-IN" smtClean="0"/>
-              <a:t>7</a:t>
+              <a:t>4</a:t>
             </a:fld>
             <a:endParaRPr lang="en-IN"/>
           </a:p>
@@ -1026,7 +1108,7 @@
           <a:p>
             <a:fld id="{5BCAD085-E8A6-8845-BD4E-CB4CCA059FC4}" type="datetimeFigureOut">
               <a:rPr lang="en-US" smtClean="0"/>
-              <a:t>7/19/2025</a:t>
+              <a:t>8/9/2025</a:t>
             </a:fld>
             <a:endParaRPr lang="en-US"/>
           </a:p>
@@ -1194,7 +1276,7 @@
           <a:p>
             <a:fld id="{5BCAD085-E8A6-8845-BD4E-CB4CCA059FC4}" type="datetimeFigureOut">
               <a:rPr lang="en-US" smtClean="0"/>
-              <a:t>7/19/2025</a:t>
+              <a:t>8/9/2025</a:t>
             </a:fld>
             <a:endParaRPr lang="en-US"/>
           </a:p>
@@ -1372,7 +1454,7 @@
           <a:p>
             <a:fld id="{5BCAD085-E8A6-8845-BD4E-CB4CCA059FC4}" type="datetimeFigureOut">
               <a:rPr lang="en-US" smtClean="0"/>
-              <a:t>7/19/2025</a:t>
+              <a:t>8/9/2025</a:t>
             </a:fld>
             <a:endParaRPr lang="en-US"/>
           </a:p>
@@ -1540,7 +1622,7 @@
           <a:p>
             <a:fld id="{5BCAD085-E8A6-8845-BD4E-CB4CCA059FC4}" type="datetimeFigureOut">
               <a:rPr lang="en-US" smtClean="0"/>
-              <a:t>7/19/2025</a:t>
+              <a:t>8/9/2025</a:t>
             </a:fld>
             <a:endParaRPr lang="en-US"/>
           </a:p>
@@ -1785,7 +1867,7 @@
           <a:p>
             <a:fld id="{5BCAD085-E8A6-8845-BD4E-CB4CCA059FC4}" type="datetimeFigureOut">
               <a:rPr lang="en-US" smtClean="0"/>
-              <a:t>7/19/2025</a:t>
+              <a:t>8/9/2025</a:t>
             </a:fld>
             <a:endParaRPr lang="en-US"/>
           </a:p>
@@ -2070,7 +2152,7 @@
           <a:p>
             <a:fld id="{5BCAD085-E8A6-8845-BD4E-CB4CCA059FC4}" type="datetimeFigureOut">
               <a:rPr lang="en-US" smtClean="0"/>
-              <a:t>7/19/2025</a:t>
+              <a:t>8/9/2025</a:t>
             </a:fld>
             <a:endParaRPr lang="en-US"/>
           </a:p>
@@ -2489,7 +2571,7 @@
           <a:p>
             <a:fld id="{5BCAD085-E8A6-8845-BD4E-CB4CCA059FC4}" type="datetimeFigureOut">
               <a:rPr lang="en-US" smtClean="0"/>
-              <a:t>7/19/2025</a:t>
+              <a:t>8/9/2025</a:t>
             </a:fld>
             <a:endParaRPr lang="en-US"/>
           </a:p>
@@ -2606,7 +2688,7 @@
           <a:p>
             <a:fld id="{5BCAD085-E8A6-8845-BD4E-CB4CCA059FC4}" type="datetimeFigureOut">
               <a:rPr lang="en-US" smtClean="0"/>
-              <a:t>7/19/2025</a:t>
+              <a:t>8/9/2025</a:t>
             </a:fld>
             <a:endParaRPr lang="en-US"/>
           </a:p>
@@ -2701,7 +2783,7 @@
           <a:p>
             <a:fld id="{5BCAD085-E8A6-8845-BD4E-CB4CCA059FC4}" type="datetimeFigureOut">
               <a:rPr lang="en-US" smtClean="0"/>
-              <a:t>7/19/2025</a:t>
+              <a:t>8/9/2025</a:t>
             </a:fld>
             <a:endParaRPr lang="en-US"/>
           </a:p>
@@ -2976,7 +3058,7 @@
           <a:p>
             <a:fld id="{5BCAD085-E8A6-8845-BD4E-CB4CCA059FC4}" type="datetimeFigureOut">
               <a:rPr lang="en-US" smtClean="0"/>
-              <a:t>7/19/2025</a:t>
+              <a:t>8/9/2025</a:t>
             </a:fld>
             <a:endParaRPr lang="en-US"/>
           </a:p>
@@ -3228,7 +3310,7 @@
           <a:p>
             <a:fld id="{5BCAD085-E8A6-8845-BD4E-CB4CCA059FC4}" type="datetimeFigureOut">
               <a:rPr lang="en-US" smtClean="0"/>
-              <a:t>7/19/2025</a:t>
+              <a:t>8/9/2025</a:t>
             </a:fld>
             <a:endParaRPr lang="en-US"/>
           </a:p>
@@ -3439,7 +3521,7 @@
           <a:p>
             <a:fld id="{5BCAD085-E8A6-8845-BD4E-CB4CCA059FC4}" type="datetimeFigureOut">
               <a:rPr lang="en-US" smtClean="0"/>
-              <a:t>7/19/2025</a:t>
+              <a:t>8/9/2025</a:t>
             </a:fld>
             <a:endParaRPr lang="en-US"/>
           </a:p>
@@ -3853,58 +3935,242 @@
             <a:spLocks noGrp="1"/>
           </p:cNvSpPr>
           <p:nvPr>
-            <p:ph type="ctrTitle"/>
+            <p:ph type="title"/>
           </p:nvPr>
         </p:nvSpPr>
         <p:spPr>
           <a:xfrm>
-            <a:off x="685800" y="1501775"/>
-            <a:ext cx="7772400" cy="1470025"/>
+            <a:off x="457200" y="274638"/>
+            <a:ext cx="8229600" cy="1143000"/>
           </a:xfrm>
         </p:spPr>
         <p:txBody>
-          <a:bodyPr/>
-          <a:lstStyle/>
-          <a:p>
-            <a:r>
-              <a:rPr dirty="0"/>
-              <a:t>C++ Template</a:t>
-            </a:r>
-            <a:r>
-              <a:rPr lang="en-IN" dirty="0"/>
-              <a:t>s &amp; Template</a:t>
-            </a:r>
-            <a:r>
-              <a:rPr dirty="0"/>
-              <a:t> Specialization</a:t>
-            </a:r>
-          </a:p>
-        </p:txBody>
-      </p:sp>
-      <p:sp>
-        <p:nvSpPr>
-          <p:cNvPr id="3" name="Subtitle 2"/>
-          <p:cNvSpPr>
-            <a:spLocks noGrp="1"/>
-          </p:cNvSpPr>
-          <p:nvPr>
-            <p:ph type="subTitle" idx="1"/>
-          </p:nvPr>
-        </p:nvSpPr>
-        <p:spPr/>
-        <p:txBody>
-          <a:bodyPr>
+          <a:bodyPr anchor="ctr">
             <a:normAutofit/>
           </a:bodyPr>
           <a:lstStyle/>
           <a:p>
             <a:r>
-              <a:rPr lang="en-IN" dirty="0"/>
+              <a:rPr lang="en-IN" b="1" dirty="0"/>
+              <a:t>C++ Templates</a:t>
+            </a:r>
+          </a:p>
+        </p:txBody>
+      </p:sp>
+      <p:pic>
+        <p:nvPicPr>
+          <p:cNvPr id="4" name="Graphic 3" descr="Programmer male outline">
+            <a:extLst>
+              <a:ext uri="{FF2B5EF4-FFF2-40B4-BE49-F238E27FC236}">
+                <a16:creationId xmlns:a16="http://schemas.microsoft.com/office/drawing/2014/main" id="{ED63E572-8BCE-75FB-194A-8A23B442216F}"/>
+              </a:ext>
+            </a:extLst>
+          </p:cNvPr>
+          <p:cNvPicPr>
+            <a:picLocks noChangeAspect="1"/>
+          </p:cNvPicPr>
+          <p:nvPr/>
+        </p:nvPicPr>
+        <p:blipFill>
+          <a:blip r:embed="rId3">
+            <a:extLst>
+              <a:ext uri="{96DAC541-7B7A-43D3-8B79-37D633B846F1}">
+                <asvg:svgBlip xmlns:asvg="http://schemas.microsoft.com/office/drawing/2016/SVG/main" r:embed="rId4"/>
+              </a:ext>
+            </a:extLst>
+          </a:blip>
+          <a:stretch>
+            <a:fillRect/>
+          </a:stretch>
+        </p:blipFill>
+        <p:spPr>
+          <a:xfrm>
+            <a:off x="457200" y="1843881"/>
+            <a:ext cx="4038600" cy="4038600"/>
+          </a:xfrm>
+          <a:prstGeom prst="rect">
+            <a:avLst/>
+          </a:prstGeom>
+        </p:spPr>
+      </p:pic>
+      <p:sp>
+        <p:nvSpPr>
+          <p:cNvPr id="7" name="Subtitle 2">
+            <a:extLst>
+              <a:ext uri="{FF2B5EF4-FFF2-40B4-BE49-F238E27FC236}">
+                <a16:creationId xmlns:a16="http://schemas.microsoft.com/office/drawing/2014/main" id="{D33E8910-570A-7EA3-8621-C595FE9F4234}"/>
+              </a:ext>
+            </a:extLst>
+          </p:cNvPr>
+          <p:cNvSpPr txBox="1">
+            <a:spLocks/>
+          </p:cNvSpPr>
+          <p:nvPr/>
+        </p:nvSpPr>
+        <p:spPr>
+          <a:xfrm>
+            <a:off x="457200" y="1417638"/>
+            <a:ext cx="8229600" cy="752907"/>
+          </a:xfrm>
+          <a:prstGeom prst="rect">
+            <a:avLst/>
+          </a:prstGeom>
+        </p:spPr>
+        <p:txBody>
+          <a:bodyPr vert="horz" lIns="91440" tIns="45720" rIns="91440" bIns="45720" rtlCol="0">
+            <a:normAutofit/>
+          </a:bodyPr>
+          <a:lstStyle>
+            <a:lvl1pPr marL="342900" indent="-342900" algn="l" defTabSz="457200" rtl="0" eaLnBrk="1" latinLnBrk="0" hangingPunct="1">
+              <a:spcBef>
+                <a:spcPct val="20000"/>
+              </a:spcBef>
+              <a:buFont typeface="Arial"/>
+              <a:buChar char="•"/>
+              <a:defRPr sz="2800" kern="1200">
+                <a:solidFill>
+                  <a:schemeClr val="tx1"/>
+                </a:solidFill>
+                <a:latin typeface="+mn-lt"/>
+                <a:ea typeface="+mn-ea"/>
+                <a:cs typeface="+mn-cs"/>
+              </a:defRPr>
+            </a:lvl1pPr>
+            <a:lvl2pPr marL="742950" indent="-285750" algn="l" defTabSz="457200" rtl="0" eaLnBrk="1" latinLnBrk="0" hangingPunct="1">
+              <a:spcBef>
+                <a:spcPct val="20000"/>
+              </a:spcBef>
+              <a:buFont typeface="Arial"/>
+              <a:buChar char="–"/>
+              <a:defRPr sz="2400" kern="1200">
+                <a:solidFill>
+                  <a:schemeClr val="tx1"/>
+                </a:solidFill>
+                <a:latin typeface="+mn-lt"/>
+                <a:ea typeface="+mn-ea"/>
+                <a:cs typeface="+mn-cs"/>
+              </a:defRPr>
+            </a:lvl2pPr>
+            <a:lvl3pPr marL="1143000" indent="-228600" algn="l" defTabSz="457200" rtl="0" eaLnBrk="1" latinLnBrk="0" hangingPunct="1">
+              <a:spcBef>
+                <a:spcPct val="20000"/>
+              </a:spcBef>
+              <a:buFont typeface="Arial"/>
+              <a:buChar char="•"/>
+              <a:defRPr sz="2000" kern="1200">
+                <a:solidFill>
+                  <a:schemeClr val="tx1"/>
+                </a:solidFill>
+                <a:latin typeface="+mn-lt"/>
+                <a:ea typeface="+mn-ea"/>
+                <a:cs typeface="+mn-cs"/>
+              </a:defRPr>
+            </a:lvl3pPr>
+            <a:lvl4pPr marL="1600200" indent="-228600" algn="l" defTabSz="457200" rtl="0" eaLnBrk="1" latinLnBrk="0" hangingPunct="1">
+              <a:spcBef>
+                <a:spcPct val="20000"/>
+              </a:spcBef>
+              <a:buFont typeface="Arial"/>
+              <a:buChar char="–"/>
+              <a:defRPr sz="1800" kern="1200">
+                <a:solidFill>
+                  <a:schemeClr val="tx1"/>
+                </a:solidFill>
+                <a:latin typeface="+mn-lt"/>
+                <a:ea typeface="+mn-ea"/>
+                <a:cs typeface="+mn-cs"/>
+              </a:defRPr>
+            </a:lvl4pPr>
+            <a:lvl5pPr marL="2057400" indent="-228600" algn="l" defTabSz="457200" rtl="0" eaLnBrk="1" latinLnBrk="0" hangingPunct="1">
+              <a:spcBef>
+                <a:spcPct val="20000"/>
+              </a:spcBef>
+              <a:buFont typeface="Arial"/>
+              <a:buChar char="»"/>
+              <a:defRPr sz="1800" kern="1200">
+                <a:solidFill>
+                  <a:schemeClr val="tx1"/>
+                </a:solidFill>
+                <a:latin typeface="+mn-lt"/>
+                <a:ea typeface="+mn-ea"/>
+                <a:cs typeface="+mn-cs"/>
+              </a:defRPr>
+            </a:lvl5pPr>
+            <a:lvl6pPr marL="2514600" indent="-228600" algn="l" defTabSz="457200" rtl="0" eaLnBrk="1" latinLnBrk="0" hangingPunct="1">
+              <a:spcBef>
+                <a:spcPct val="20000"/>
+              </a:spcBef>
+              <a:buFont typeface="Arial"/>
+              <a:buChar char="•"/>
+              <a:defRPr sz="1800" kern="1200">
+                <a:solidFill>
+                  <a:schemeClr val="tx1"/>
+                </a:solidFill>
+                <a:latin typeface="+mn-lt"/>
+                <a:ea typeface="+mn-ea"/>
+                <a:cs typeface="+mn-cs"/>
+              </a:defRPr>
+            </a:lvl6pPr>
+            <a:lvl7pPr marL="2971800" indent="-228600" algn="l" defTabSz="457200" rtl="0" eaLnBrk="1" latinLnBrk="0" hangingPunct="1">
+              <a:spcBef>
+                <a:spcPct val="20000"/>
+              </a:spcBef>
+              <a:buFont typeface="Arial"/>
+              <a:buChar char="•"/>
+              <a:defRPr sz="1800" kern="1200">
+                <a:solidFill>
+                  <a:schemeClr val="tx1"/>
+                </a:solidFill>
+                <a:latin typeface="+mn-lt"/>
+                <a:ea typeface="+mn-ea"/>
+                <a:cs typeface="+mn-cs"/>
+              </a:defRPr>
+            </a:lvl7pPr>
+            <a:lvl8pPr marL="3429000" indent="-228600" algn="l" defTabSz="457200" rtl="0" eaLnBrk="1" latinLnBrk="0" hangingPunct="1">
+              <a:spcBef>
+                <a:spcPct val="20000"/>
+              </a:spcBef>
+              <a:buFont typeface="Arial"/>
+              <a:buChar char="•"/>
+              <a:defRPr sz="1800" kern="1200">
+                <a:solidFill>
+                  <a:schemeClr val="tx1"/>
+                </a:solidFill>
+                <a:latin typeface="+mn-lt"/>
+                <a:ea typeface="+mn-ea"/>
+                <a:cs typeface="+mn-cs"/>
+              </a:defRPr>
+            </a:lvl8pPr>
+            <a:lvl9pPr marL="3886200" indent="-228600" algn="l" defTabSz="457200" rtl="0" eaLnBrk="1" latinLnBrk="0" hangingPunct="1">
+              <a:spcBef>
+                <a:spcPct val="20000"/>
+              </a:spcBef>
+              <a:buFont typeface="Arial"/>
+              <a:buChar char="•"/>
+              <a:defRPr sz="1800" kern="1200">
+                <a:solidFill>
+                  <a:schemeClr val="tx1"/>
+                </a:solidFill>
+                <a:latin typeface="+mn-lt"/>
+                <a:ea typeface="+mn-ea"/>
+                <a:cs typeface="+mn-cs"/>
+              </a:defRPr>
+            </a:lvl9pPr>
+          </a:lstStyle>
+          <a:p>
+            <a:pPr marL="0" indent="0">
+              <a:buNone/>
+            </a:pPr>
+            <a:r>
+              <a:rPr lang="en-IN" dirty="0">
+                <a:solidFill>
+                  <a:schemeClr val="bg1">
+                    <a:lumMod val="50000"/>
+                  </a:schemeClr>
+                </a:solidFill>
+              </a:rPr>
               <a:t>Understanding All Aspects and Scenarios with Examples</a:t>
             </a:r>
-          </a:p>
-          <a:p>
-            <a:endParaRPr dirty="0"/>
           </a:p>
         </p:txBody>
       </p:sp>
@@ -3917,293 +4183,6 @@
 </file>
 
 <file path=ppt/slides/slide10.xml><?xml version="1.0" encoding="utf-8"?>
-<p:sld xmlns:a="http://schemas.openxmlformats.org/drawingml/2006/main" xmlns:r="http://schemas.openxmlformats.org/officeDocument/2006/relationships" xmlns:p="http://schemas.openxmlformats.org/presentationml/2006/main">
-  <p:cSld>
-    <p:spTree>
-      <p:nvGrpSpPr>
-        <p:cNvPr id="1" name=""/>
-        <p:cNvGrpSpPr/>
-        <p:nvPr/>
-      </p:nvGrpSpPr>
-      <p:grpSpPr>
-        <a:xfrm>
-          <a:off x="0" y="0"/>
-          <a:ext cx="0" cy="0"/>
-          <a:chOff x="0" y="0"/>
-          <a:chExt cx="0" cy="0"/>
-        </a:xfrm>
-      </p:grpSpPr>
-      <p:sp>
-        <p:nvSpPr>
-          <p:cNvPr id="2" name="Title 1"/>
-          <p:cNvSpPr>
-            <a:spLocks noGrp="1"/>
-          </p:cNvSpPr>
-          <p:nvPr>
-            <p:ph type="title"/>
-          </p:nvPr>
-        </p:nvSpPr>
-        <p:spPr/>
-        <p:txBody>
-          <a:bodyPr/>
-          <a:lstStyle/>
-          <a:p>
-            <a:r>
-              <a:t>Partial Template Specialization</a:t>
-            </a:r>
-          </a:p>
-        </p:txBody>
-      </p:sp>
-      <p:sp>
-        <p:nvSpPr>
-          <p:cNvPr id="3" name="Content Placeholder 2"/>
-          <p:cNvSpPr>
-            <a:spLocks noGrp="1"/>
-          </p:cNvSpPr>
-          <p:nvPr>
-            <p:ph idx="1"/>
-          </p:nvPr>
-        </p:nvSpPr>
-        <p:spPr/>
-        <p:txBody>
-          <a:bodyPr>
-            <a:normAutofit/>
-          </a:bodyPr>
-          <a:lstStyle/>
-          <a:p>
-            <a:r>
-              <a:rPr dirty="0"/>
-              <a:t>Partial specialization customizes the template for a subset of types.</a:t>
-            </a:r>
-          </a:p>
-          <a:p>
-            <a:endParaRPr dirty="0"/>
-          </a:p>
-          <a:p>
-            <a:r>
-              <a:rPr dirty="0"/>
-              <a:t>Example:</a:t>
-            </a:r>
-            <a:endParaRPr lang="en-IN" dirty="0"/>
-          </a:p>
-          <a:p>
-            <a:pPr marL="457200" lvl="1" indent="0">
-              <a:buNone/>
-            </a:pPr>
-            <a:r>
-              <a:rPr dirty="0"/>
-              <a:t>template&lt;typename T&gt;</a:t>
-            </a:r>
-          </a:p>
-          <a:p>
-            <a:pPr marL="400050" lvl="1" indent="0">
-              <a:buNone/>
-            </a:pPr>
-            <a:r>
-              <a:rPr lang="en-IN" dirty="0"/>
-              <a:t>	</a:t>
-            </a:r>
-            <a:r>
-              <a:rPr dirty="0"/>
-              <a:t>class </a:t>
-            </a:r>
-            <a:r>
-              <a:rPr lang="en-IN" dirty="0"/>
-              <a:t>Box </a:t>
-            </a:r>
-            <a:r>
-              <a:rPr dirty="0"/>
-              <a:t>&lt;T*&gt; {</a:t>
-            </a:r>
-          </a:p>
-          <a:p>
-            <a:pPr marL="400050" lvl="1" indent="0">
-              <a:buNone/>
-            </a:pPr>
-            <a:r>
-              <a:rPr dirty="0"/>
-              <a:t>    </a:t>
-            </a:r>
-            <a:r>
-              <a:rPr lang="en-IN" dirty="0"/>
-              <a:t>	</a:t>
-            </a:r>
-            <a:r>
-              <a:rPr dirty="0"/>
-              <a:t>// Specialized for pointer types</a:t>
-            </a:r>
-          </a:p>
-          <a:p>
-            <a:pPr marL="400050" lvl="1" indent="0">
-              <a:buNone/>
-            </a:pPr>
-            <a:r>
-              <a:rPr lang="en-IN" dirty="0"/>
-              <a:t>	</a:t>
-            </a:r>
-            <a:r>
-              <a:rPr dirty="0"/>
-              <a:t>};</a:t>
-            </a:r>
-          </a:p>
-        </p:txBody>
-      </p:sp>
-    </p:spTree>
-  </p:cSld>
-  <p:clrMapOvr>
-    <a:masterClrMapping/>
-  </p:clrMapOvr>
-</p:sld>
-</file>
-
-<file path=ppt/slides/slide11.xml><?xml version="1.0" encoding="utf-8"?>
-<p:sld xmlns:a="http://schemas.openxmlformats.org/drawingml/2006/main" xmlns:r="http://schemas.openxmlformats.org/officeDocument/2006/relationships" xmlns:p="http://schemas.openxmlformats.org/presentationml/2006/main">
-  <p:cSld>
-    <p:spTree>
-      <p:nvGrpSpPr>
-        <p:cNvPr id="1" name=""/>
-        <p:cNvGrpSpPr/>
-        <p:nvPr/>
-      </p:nvGrpSpPr>
-      <p:grpSpPr>
-        <a:xfrm>
-          <a:off x="0" y="0"/>
-          <a:ext cx="0" cy="0"/>
-          <a:chOff x="0" y="0"/>
-          <a:chExt cx="0" cy="0"/>
-        </a:xfrm>
-      </p:grpSpPr>
-      <p:sp>
-        <p:nvSpPr>
-          <p:cNvPr id="2" name="Title 1"/>
-          <p:cNvSpPr>
-            <a:spLocks noGrp="1"/>
-          </p:cNvSpPr>
-          <p:nvPr>
-            <p:ph type="title"/>
-          </p:nvPr>
-        </p:nvSpPr>
-        <p:spPr/>
-        <p:txBody>
-          <a:bodyPr>
-            <a:normAutofit fontScale="90000"/>
-          </a:bodyPr>
-          <a:lstStyle/>
-          <a:p>
-            <a:r>
-              <a:rPr dirty="0"/>
-              <a:t>Template </a:t>
-            </a:r>
-            <a:r>
-              <a:rPr lang="en-IN" dirty="0"/>
-              <a:t>Non-Type &amp; Default </a:t>
-            </a:r>
-            <a:r>
-              <a:rPr dirty="0"/>
-              <a:t>Parameters</a:t>
-            </a:r>
-          </a:p>
-        </p:txBody>
-      </p:sp>
-      <p:sp>
-        <p:nvSpPr>
-          <p:cNvPr id="3" name="Content Placeholder 2"/>
-          <p:cNvSpPr>
-            <a:spLocks noGrp="1"/>
-          </p:cNvSpPr>
-          <p:nvPr>
-            <p:ph idx="1"/>
-          </p:nvPr>
-        </p:nvSpPr>
-        <p:spPr/>
-        <p:txBody>
-          <a:bodyPr>
-            <a:normAutofit lnSpcReduction="10000"/>
-          </a:bodyPr>
-          <a:lstStyle/>
-          <a:p>
-            <a:r>
-              <a:rPr lang="en-IN" dirty="0"/>
-              <a:t>Default</a:t>
-            </a:r>
-            <a:r>
-              <a:rPr dirty="0"/>
-              <a:t> parameters:</a:t>
-            </a:r>
-            <a:endParaRPr lang="en-IN" dirty="0"/>
-          </a:p>
-          <a:p>
-            <a:pPr marL="400050" lvl="1" indent="0">
-              <a:buNone/>
-            </a:pPr>
-            <a:r>
-              <a:rPr lang="en-IN" dirty="0"/>
-              <a:t>template &lt;class T1, class T2 = double&gt;</a:t>
-            </a:r>
-          </a:p>
-          <a:p>
-            <a:pPr marL="400050" lvl="1" indent="0">
-              <a:buNone/>
-            </a:pPr>
-            <a:r>
-              <a:rPr lang="en-IN" dirty="0"/>
-              <a:t>entity_definition</a:t>
-            </a:r>
-          </a:p>
-          <a:p>
-            <a:endParaRPr lang="en-IN" dirty="0"/>
-          </a:p>
-          <a:p>
-            <a:r>
-              <a:rPr dirty="0"/>
-              <a:t>Non-type parameters:</a:t>
-            </a:r>
-            <a:endParaRPr lang="en-IN" dirty="0"/>
-          </a:p>
-          <a:p>
-            <a:pPr marL="400050" lvl="1" indent="0">
-              <a:buNone/>
-            </a:pPr>
-            <a:r>
-              <a:rPr lang="en-IN" dirty="0"/>
-              <a:t>template &lt;class T, int N&gt;</a:t>
-            </a:r>
-          </a:p>
-          <a:p>
-            <a:pPr marL="400050" lvl="1" indent="0">
-              <a:buNone/>
-            </a:pPr>
-            <a:r>
-              <a:rPr lang="en-IN" dirty="0"/>
-              <a:t>entity_definition</a:t>
-            </a:r>
-          </a:p>
-          <a:p>
-            <a:pPr marL="400050" lvl="1" indent="0">
-              <a:buNone/>
-            </a:pPr>
-            <a:endParaRPr lang="en-IN" dirty="0"/>
-          </a:p>
-          <a:p>
-            <a:pPr marL="400050" lvl="1" indent="0">
-              <a:buNone/>
-            </a:pPr>
-            <a:r>
-              <a:rPr lang="en-IN" dirty="0"/>
-              <a:t>- non-type parameters must be const</a:t>
-            </a:r>
-          </a:p>
-        </p:txBody>
-      </p:sp>
-    </p:spTree>
-  </p:cSld>
-  <p:clrMapOvr>
-    <a:masterClrMapping/>
-  </p:clrMapOvr>
-</p:sld>
-</file>
-
-<file path=ppt/slides/slide12.xml><?xml version="1.0" encoding="utf-8"?>
 <p:sld xmlns:a="http://schemas.openxmlformats.org/drawingml/2006/main" xmlns:r="http://schemas.openxmlformats.org/officeDocument/2006/relationships" xmlns:p="http://schemas.openxmlformats.org/presentationml/2006/main">
   <p:cSld>
     <p:spTree>
@@ -4242,13 +4221,19 @@
             <p:ph type="title"/>
           </p:nvPr>
         </p:nvSpPr>
-        <p:spPr/>
+        <p:spPr>
+          <a:xfrm>
+            <a:off x="1052946" y="274638"/>
+            <a:ext cx="7633854" cy="1143000"/>
+          </a:xfrm>
+        </p:spPr>
         <p:txBody>
           <a:bodyPr>
             <a:normAutofit/>
           </a:bodyPr>
           <a:lstStyle/>
           <a:p>
+            <a:pPr algn="l"/>
             <a:r>
               <a:rPr lang="en-IN" dirty="0"/>
               <a:t>Template Argument Deduction</a:t>
@@ -4281,152 +4266,136 @@
           <a:lstStyle/>
           <a:p>
             <a:r>
-              <a:rPr lang="en-IN" dirty="0"/>
-              <a:t>Automatically deduces the data type of the argument passed to the templates</a:t>
-            </a:r>
-            <a:r>
-              <a:rPr dirty="0"/>
-              <a:t>.</a:t>
+              <a:rPr lang="en-IN"/>
+              <a:t>Automatically deduces the data type of the argument passed to the templates.</a:t>
+            </a:r>
+          </a:p>
+          <a:p>
+            <a:pPr lvl="1"/>
+            <a:r>
+              <a:rPr lang="en-IN" sz="3200"/>
+              <a:t>Function Template Arguments Deduction</a:t>
+            </a:r>
+          </a:p>
+          <a:p>
+            <a:pPr lvl="1"/>
+            <a:r>
+              <a:rPr lang="en-IN" sz="3200"/>
+              <a:t>Class Template Arguments Deduction (C++17 Onwards)</a:t>
+            </a:r>
+          </a:p>
+          <a:p>
+            <a:pPr lvl="1"/>
+            <a:endParaRPr lang="en-IN"/>
+          </a:p>
+          <a:p>
+            <a:endParaRPr lang="en-IN"/>
+          </a:p>
+          <a:p>
+            <a:r>
+              <a:rPr lang="en-IN"/>
+              <a:t>Example:</a:t>
+            </a:r>
+          </a:p>
+          <a:p>
+            <a:pPr marL="457200" lvl="1" indent="0">
+              <a:buNone/>
+            </a:pPr>
+            <a:r>
+              <a:rPr lang="en-IN"/>
+              <a:t>template&lt;typename T&gt;</a:t>
+            </a:r>
+          </a:p>
+          <a:p>
+            <a:pPr marL="400050" lvl="1" indent="0">
+              <a:buNone/>
+            </a:pPr>
+            <a:r>
+              <a:rPr lang="en-IN"/>
+              <a:t>	class Box{</a:t>
+            </a:r>
+          </a:p>
+          <a:p>
+            <a:pPr marL="400050" lvl="1" indent="0">
+              <a:buNone/>
+            </a:pPr>
+            <a:r>
+              <a:rPr lang="en-IN"/>
+              <a:t>	public:</a:t>
+            </a:r>
+          </a:p>
+          <a:p>
+            <a:pPr marL="400050" lvl="1" indent="0">
+              <a:buNone/>
+            </a:pPr>
+            <a:r>
+              <a:rPr lang="en-IN"/>
+              <a:t>		Box(T val){	cout&lt;&lt;val;	}			</a:t>
+            </a:r>
+          </a:p>
+          <a:p>
+            <a:pPr marL="400050" lvl="1" indent="0">
+              <a:buNone/>
+            </a:pPr>
+            <a:r>
+              <a:rPr lang="en-IN"/>
+              <a:t>};</a:t>
+            </a:r>
+          </a:p>
+          <a:p>
+            <a:pPr marL="400050" lvl="1" indent="0">
+              <a:buNone/>
+            </a:pPr>
+            <a:endParaRPr lang="en-IN"/>
+          </a:p>
+          <a:p>
+            <a:pPr marL="400050" lvl="1" indent="0">
+              <a:buNone/>
+            </a:pPr>
+            <a:r>
+              <a:rPr lang="en-IN"/>
+              <a:t>Box obj(10);	//supported C++17 onwards</a:t>
             </a:r>
             <a:endParaRPr lang="en-IN" dirty="0"/>
           </a:p>
-          <a:p>
-            <a:pPr lvl="1"/>
-            <a:r>
-              <a:rPr lang="en-IN" sz="3200" dirty="0"/>
-              <a:t>Function Template Arguments Deduction</a:t>
-            </a:r>
-          </a:p>
-          <a:p>
-            <a:pPr lvl="1"/>
-            <a:r>
-              <a:rPr lang="en-IN" sz="3200" dirty="0"/>
-              <a:t>Class Template Arguments Deduction (C++17 Onwards)</a:t>
-            </a:r>
-          </a:p>
-          <a:p>
-            <a:pPr lvl="1"/>
-            <a:endParaRPr dirty="0"/>
-          </a:p>
-          <a:p>
-            <a:endParaRPr dirty="0"/>
-          </a:p>
-          <a:p>
-            <a:r>
-              <a:rPr dirty="0"/>
-              <a:t>Example:</a:t>
-            </a:r>
-            <a:endParaRPr lang="en-IN" dirty="0"/>
-          </a:p>
-          <a:p>
-            <a:pPr marL="457200" lvl="1" indent="0">
-              <a:buNone/>
-            </a:pPr>
-            <a:r>
-              <a:rPr dirty="0"/>
-              <a:t>template&lt;typename T&gt;</a:t>
-            </a:r>
-          </a:p>
-          <a:p>
-            <a:pPr marL="400050" lvl="1" indent="0">
-              <a:buNone/>
-            </a:pPr>
-            <a:r>
-              <a:rPr lang="en-IN" dirty="0"/>
-              <a:t>	</a:t>
-            </a:r>
-            <a:r>
-              <a:rPr dirty="0"/>
-              <a:t>class </a:t>
-            </a:r>
-            <a:r>
-              <a:rPr lang="en-IN" dirty="0"/>
-              <a:t>Box</a:t>
-            </a:r>
-            <a:r>
-              <a:rPr dirty="0"/>
-              <a:t>{</a:t>
-            </a:r>
-            <a:endParaRPr lang="en-IN" dirty="0"/>
-          </a:p>
-          <a:p>
-            <a:pPr marL="400050" lvl="1" indent="0">
-              <a:buNone/>
-            </a:pPr>
-            <a:r>
-              <a:rPr lang="en-IN" dirty="0"/>
-              <a:t>	public:</a:t>
-            </a:r>
-          </a:p>
-          <a:p>
-            <a:pPr marL="400050" lvl="1" indent="0">
-              <a:buNone/>
-            </a:pPr>
-            <a:r>
-              <a:rPr lang="en-IN" dirty="0"/>
-              <a:t>		Box(T </a:t>
-            </a:r>
-            <a:r>
-              <a:rPr lang="en-IN" dirty="0" err="1"/>
-              <a:t>val</a:t>
-            </a:r>
-            <a:r>
-              <a:rPr lang="en-IN" dirty="0"/>
-              <a:t>){	</a:t>
-            </a:r>
-            <a:r>
-              <a:rPr lang="en-IN" dirty="0" err="1"/>
-              <a:t>cout</a:t>
-            </a:r>
-            <a:r>
-              <a:rPr lang="en-IN" dirty="0"/>
-              <a:t>&lt;&lt;</a:t>
-            </a:r>
-            <a:r>
-              <a:rPr lang="en-IN" dirty="0" err="1"/>
-              <a:t>val</a:t>
-            </a:r>
-            <a:r>
-              <a:rPr lang="en-IN" dirty="0"/>
-              <a:t>;	}			</a:t>
-            </a:r>
-          </a:p>
-          <a:p>
-            <a:pPr marL="400050" lvl="1" indent="0">
-              <a:buNone/>
-            </a:pPr>
-            <a:r>
-              <a:rPr dirty="0"/>
-              <a:t>};</a:t>
-            </a:r>
-            <a:endParaRPr lang="en-IN" dirty="0"/>
-          </a:p>
-          <a:p>
-            <a:pPr marL="400050" lvl="1" indent="0">
-              <a:buNone/>
-            </a:pPr>
-            <a:endParaRPr lang="en-IN" dirty="0"/>
-          </a:p>
-          <a:p>
-            <a:pPr marL="400050" lvl="1" indent="0">
-              <a:buNone/>
-            </a:pPr>
-            <a:r>
-              <a:rPr lang="en-IN" dirty="0"/>
-              <a:t>Box </a:t>
-            </a:r>
-            <a:r>
-              <a:rPr lang="en-IN" dirty="0" err="1"/>
-              <a:t>obj</a:t>
-            </a:r>
-            <a:r>
-              <a:rPr lang="en-IN" dirty="0"/>
-              <a:t>(10);	//supported C++17 onwards</a:t>
-            </a:r>
-            <a:endParaRPr dirty="0"/>
-          </a:p>
-        </p:txBody>
-      </p:sp>
+        </p:txBody>
+      </p:sp>
+      <p:pic>
+        <p:nvPicPr>
+          <p:cNvPr id="4" name="Graphic 3" descr="Programmer male with solid fill">
+            <a:extLst>
+              <a:ext uri="{FF2B5EF4-FFF2-40B4-BE49-F238E27FC236}">
+                <a16:creationId xmlns:a16="http://schemas.microsoft.com/office/drawing/2014/main" id="{984B0067-A6AF-9914-B978-72C0048EED67}"/>
+              </a:ext>
+            </a:extLst>
+          </p:cNvPr>
+          <p:cNvPicPr>
+            <a:picLocks noChangeAspect="1"/>
+          </p:cNvPicPr>
+          <p:nvPr/>
+        </p:nvPicPr>
+        <p:blipFill>
+          <a:blip r:embed="rId2">
+            <a:extLst>
+              <a:ext uri="{96DAC541-7B7A-43D3-8B79-37D633B846F1}">
+                <asvg:svgBlip xmlns:asvg="http://schemas.microsoft.com/office/drawing/2016/SVG/main" r:embed="rId3"/>
+              </a:ext>
+            </a:extLst>
+          </a:blip>
+          <a:stretch>
+            <a:fillRect/>
+          </a:stretch>
+        </p:blipFill>
+        <p:spPr>
+          <a:xfrm>
+            <a:off x="457200" y="548265"/>
+            <a:ext cx="595746" cy="595746"/>
+          </a:xfrm>
+          <a:prstGeom prst="rect">
+            <a:avLst/>
+          </a:prstGeom>
+        </p:spPr>
+      </p:pic>
     </p:spTree>
     <p:extLst>
       <p:ext uri="{BB962C8B-B14F-4D97-AF65-F5344CB8AC3E}">
@@ -4440,7 +4409,7 @@
 </p:sld>
 </file>
 
-<file path=ppt/slides/slide13.xml><?xml version="1.0" encoding="utf-8"?>
+<file path=ppt/slides/slide11.xml><?xml version="1.0" encoding="utf-8"?>
 <p:sld xmlns:a="http://schemas.openxmlformats.org/drawingml/2006/main" xmlns:r="http://schemas.openxmlformats.org/officeDocument/2006/relationships" xmlns:p="http://schemas.openxmlformats.org/presentationml/2006/main">
   <p:cSld>
     <p:spTree>
@@ -4479,18 +4448,24 @@
             <p:ph type="title"/>
           </p:nvPr>
         </p:nvSpPr>
-        <p:spPr/>
+        <p:spPr>
+          <a:xfrm>
+            <a:off x="1052946" y="274638"/>
+            <a:ext cx="7633854" cy="1143000"/>
+          </a:xfrm>
+        </p:spPr>
         <p:txBody>
           <a:bodyPr>
             <a:normAutofit/>
           </a:bodyPr>
           <a:lstStyle/>
           <a:p>
-            <a:r>
-              <a:rPr lang="en-IN" sz="4000" dirty="0"/>
+            <a:pPr algn="l"/>
+            <a:r>
+              <a:rPr lang="en-IN" dirty="0"/>
               <a:t>Template Metaprogramming</a:t>
             </a:r>
-            <a:endParaRPr sz="4000" dirty="0"/>
+            <a:endParaRPr dirty="0"/>
           </a:p>
         </p:txBody>
       </p:sp>
@@ -5139,12 +5114,359 @@
           </a:p>
         </p:txBody>
       </p:sp>
+      <p:pic>
+        <p:nvPicPr>
+          <p:cNvPr id="4" name="Graphic 3" descr="Programmer male with solid fill">
+            <a:extLst>
+              <a:ext uri="{FF2B5EF4-FFF2-40B4-BE49-F238E27FC236}">
+                <a16:creationId xmlns:a16="http://schemas.microsoft.com/office/drawing/2014/main" id="{67D7D7D9-5285-C6C3-CDC9-EE6FE1ECAF34}"/>
+              </a:ext>
+            </a:extLst>
+          </p:cNvPr>
+          <p:cNvPicPr>
+            <a:picLocks noChangeAspect="1"/>
+          </p:cNvPicPr>
+          <p:nvPr/>
+        </p:nvPicPr>
+        <p:blipFill>
+          <a:blip r:embed="rId2">
+            <a:extLst>
+              <a:ext uri="{96DAC541-7B7A-43D3-8B79-37D633B846F1}">
+                <asvg:svgBlip xmlns:asvg="http://schemas.microsoft.com/office/drawing/2016/SVG/main" r:embed="rId3"/>
+              </a:ext>
+            </a:extLst>
+          </a:blip>
+          <a:stretch>
+            <a:fillRect/>
+          </a:stretch>
+        </p:blipFill>
+        <p:spPr>
+          <a:xfrm>
+            <a:off x="457200" y="548265"/>
+            <a:ext cx="595746" cy="595746"/>
+          </a:xfrm>
+          <a:prstGeom prst="rect">
+            <a:avLst/>
+          </a:prstGeom>
+        </p:spPr>
+      </p:pic>
     </p:spTree>
     <p:extLst>
       <p:ext uri="{BB962C8B-B14F-4D97-AF65-F5344CB8AC3E}">
         <p14:creationId xmlns:p14="http://schemas.microsoft.com/office/powerpoint/2010/main" val="116941841"/>
       </p:ext>
     </p:extLst>
+  </p:cSld>
+  <p:clrMapOvr>
+    <a:masterClrMapping/>
+  </p:clrMapOvr>
+</p:sld>
+</file>
+
+<file path=ppt/slides/slide12.xml><?xml version="1.0" encoding="utf-8"?>
+<p:sld xmlns:a="http://schemas.openxmlformats.org/drawingml/2006/main" xmlns:r="http://schemas.openxmlformats.org/officeDocument/2006/relationships" xmlns:p="http://schemas.openxmlformats.org/presentationml/2006/main">
+  <p:cSld>
+    <p:spTree>
+      <p:nvGrpSpPr>
+        <p:cNvPr id="1" name=""/>
+        <p:cNvGrpSpPr/>
+        <p:nvPr/>
+      </p:nvGrpSpPr>
+      <p:grpSpPr>
+        <a:xfrm>
+          <a:off x="0" y="0"/>
+          <a:ext cx="0" cy="0"/>
+          <a:chOff x="0" y="0"/>
+          <a:chExt cx="0" cy="0"/>
+        </a:xfrm>
+      </p:grpSpPr>
+      <p:sp>
+        <p:nvSpPr>
+          <p:cNvPr id="2" name="Title 1"/>
+          <p:cNvSpPr>
+            <a:spLocks noGrp="1"/>
+          </p:cNvSpPr>
+          <p:nvPr>
+            <p:ph type="title"/>
+          </p:nvPr>
+        </p:nvSpPr>
+        <p:spPr>
+          <a:xfrm>
+            <a:off x="1052946" y="274638"/>
+            <a:ext cx="7633854" cy="1143000"/>
+          </a:xfrm>
+        </p:spPr>
+        <p:txBody>
+          <a:bodyPr/>
+          <a:lstStyle/>
+          <a:p>
+            <a:pPr algn="l"/>
+            <a:r>
+              <a:rPr dirty="0"/>
+              <a:t>Scenarios and Use Cases</a:t>
+            </a:r>
+          </a:p>
+        </p:txBody>
+      </p:sp>
+      <p:sp>
+        <p:nvSpPr>
+          <p:cNvPr id="3" name="Content Placeholder 2"/>
+          <p:cNvSpPr>
+            <a:spLocks noGrp="1"/>
+          </p:cNvSpPr>
+          <p:nvPr>
+            <p:ph idx="1"/>
+          </p:nvPr>
+        </p:nvSpPr>
+        <p:spPr/>
+        <p:txBody>
+          <a:bodyPr>
+            <a:normAutofit/>
+          </a:bodyPr>
+          <a:lstStyle/>
+          <a:p>
+            <a:r>
+              <a:rPr dirty="0"/>
+              <a:t>Generic containers and algorithms</a:t>
+            </a:r>
+          </a:p>
+          <a:p>
+            <a:r>
+              <a:rPr dirty="0"/>
+              <a:t>Type-safe operations</a:t>
+            </a:r>
+          </a:p>
+          <a:p>
+            <a:r>
+              <a:rPr dirty="0"/>
+              <a:t>Code reuse and abstraction</a:t>
+            </a:r>
+          </a:p>
+          <a:p>
+            <a:r>
+              <a:rPr dirty="0"/>
+              <a:t>Custom behavior for specific types</a:t>
+            </a:r>
+            <a:endParaRPr lang="en-IN" dirty="0"/>
+          </a:p>
+          <a:p>
+            <a:r>
+              <a:rPr lang="en-IN" dirty="0"/>
+              <a:t>Default Template Arguments</a:t>
+            </a:r>
+          </a:p>
+          <a:p>
+            <a:endParaRPr lang="en-IN" dirty="0"/>
+          </a:p>
+        </p:txBody>
+      </p:sp>
+      <p:pic>
+        <p:nvPicPr>
+          <p:cNvPr id="6" name="Graphic 5" descr="Programmer male outline">
+            <a:extLst>
+              <a:ext uri="{FF2B5EF4-FFF2-40B4-BE49-F238E27FC236}">
+                <a16:creationId xmlns:a16="http://schemas.microsoft.com/office/drawing/2014/main" id="{6174C6D7-F0A7-0C5A-BF03-EA55EC6DE7B1}"/>
+              </a:ext>
+            </a:extLst>
+          </p:cNvPr>
+          <p:cNvPicPr>
+            <a:picLocks noChangeAspect="1"/>
+          </p:cNvPicPr>
+          <p:nvPr/>
+        </p:nvPicPr>
+        <p:blipFill>
+          <a:blip r:embed="rId2">
+            <a:extLst>
+              <a:ext uri="{96DAC541-7B7A-43D3-8B79-37D633B846F1}">
+                <asvg:svgBlip xmlns:asvg="http://schemas.microsoft.com/office/drawing/2016/SVG/main" r:embed="rId3"/>
+              </a:ext>
+            </a:extLst>
+          </a:blip>
+          <a:stretch>
+            <a:fillRect/>
+          </a:stretch>
+        </p:blipFill>
+        <p:spPr>
+          <a:xfrm>
+            <a:off x="457200" y="548265"/>
+            <a:ext cx="595746" cy="595746"/>
+          </a:xfrm>
+          <a:prstGeom prst="rect">
+            <a:avLst/>
+          </a:prstGeom>
+        </p:spPr>
+      </p:pic>
+    </p:spTree>
+  </p:cSld>
+  <p:clrMapOvr>
+    <a:masterClrMapping/>
+  </p:clrMapOvr>
+</p:sld>
+</file>
+
+<file path=ppt/slides/slide13.xml><?xml version="1.0" encoding="utf-8"?>
+<p:sld xmlns:a="http://schemas.openxmlformats.org/drawingml/2006/main" xmlns:r="http://schemas.openxmlformats.org/officeDocument/2006/relationships" xmlns:p="http://schemas.openxmlformats.org/presentationml/2006/main">
+  <p:cSld>
+    <p:spTree>
+      <p:nvGrpSpPr>
+        <p:cNvPr id="1" name=""/>
+        <p:cNvGrpSpPr/>
+        <p:nvPr/>
+      </p:nvGrpSpPr>
+      <p:grpSpPr>
+        <a:xfrm>
+          <a:off x="0" y="0"/>
+          <a:ext cx="0" cy="0"/>
+          <a:chOff x="0" y="0"/>
+          <a:chExt cx="0" cy="0"/>
+        </a:xfrm>
+      </p:grpSpPr>
+      <p:sp>
+        <p:nvSpPr>
+          <p:cNvPr id="2" name="Title 1"/>
+          <p:cNvSpPr>
+            <a:spLocks noGrp="1"/>
+          </p:cNvSpPr>
+          <p:nvPr>
+            <p:ph type="title"/>
+          </p:nvPr>
+        </p:nvSpPr>
+        <p:spPr>
+          <a:xfrm>
+            <a:off x="1052946" y="274638"/>
+            <a:ext cx="7633854" cy="1143000"/>
+          </a:xfrm>
+        </p:spPr>
+        <p:txBody>
+          <a:bodyPr>
+            <a:normAutofit/>
+          </a:bodyPr>
+          <a:lstStyle/>
+          <a:p>
+            <a:pPr algn="l"/>
+            <a:r>
+              <a:rPr dirty="0"/>
+              <a:t>Limitations and Best Practices</a:t>
+            </a:r>
+          </a:p>
+        </p:txBody>
+      </p:sp>
+      <p:sp>
+        <p:nvSpPr>
+          <p:cNvPr id="3" name="Content Placeholder 2"/>
+          <p:cNvSpPr>
+            <a:spLocks noGrp="1"/>
+          </p:cNvSpPr>
+          <p:nvPr>
+            <p:ph idx="1"/>
+          </p:nvPr>
+        </p:nvSpPr>
+        <p:spPr/>
+        <p:txBody>
+          <a:bodyPr>
+            <a:normAutofit lnSpcReduction="10000"/>
+          </a:bodyPr>
+          <a:lstStyle/>
+          <a:p>
+            <a:r>
+              <a:rPr dirty="0"/>
+              <a:t>Limitations:</a:t>
+            </a:r>
+          </a:p>
+          <a:p>
+            <a:pPr lvl="1"/>
+            <a:r>
+              <a:rPr dirty="0"/>
+              <a:t>Increased complexity</a:t>
+            </a:r>
+          </a:p>
+          <a:p>
+            <a:pPr lvl="1"/>
+            <a:r>
+              <a:rPr dirty="0"/>
+              <a:t>Code duplication risk</a:t>
+            </a:r>
+            <a:endParaRPr lang="en-IN" dirty="0"/>
+          </a:p>
+          <a:p>
+            <a:pPr lvl="1"/>
+            <a:r>
+              <a:rPr lang="en-IN" dirty="0"/>
+              <a:t>Template Specialization for Variable not allowed</a:t>
+            </a:r>
+            <a:endParaRPr dirty="0"/>
+          </a:p>
+          <a:p>
+            <a:endParaRPr dirty="0"/>
+          </a:p>
+          <a:p>
+            <a:r>
+              <a:rPr dirty="0"/>
+              <a:t>Best Practices:</a:t>
+            </a:r>
+            <a:endParaRPr lang="en-IN" dirty="0"/>
+          </a:p>
+          <a:p>
+            <a:pPr lvl="1"/>
+            <a:r>
+              <a:rPr lang="en-IN" dirty="0"/>
+              <a:t>Use templates for generic behavior</a:t>
+            </a:r>
+            <a:endParaRPr dirty="0"/>
+          </a:p>
+          <a:p>
+            <a:pPr lvl="1"/>
+            <a:r>
+              <a:rPr dirty="0"/>
+              <a:t>Use specialization only when necessary</a:t>
+            </a:r>
+          </a:p>
+          <a:p>
+            <a:pPr lvl="1"/>
+            <a:r>
+              <a:rPr dirty="0"/>
+              <a:t>Prefer partial over full specialization</a:t>
+            </a:r>
+          </a:p>
+        </p:txBody>
+      </p:sp>
+      <p:pic>
+        <p:nvPicPr>
+          <p:cNvPr id="4" name="Graphic 3" descr="Programmer male outline">
+            <a:extLst>
+              <a:ext uri="{FF2B5EF4-FFF2-40B4-BE49-F238E27FC236}">
+                <a16:creationId xmlns:a16="http://schemas.microsoft.com/office/drawing/2014/main" id="{73DCA223-452A-B432-6640-085A6C7FBEA8}"/>
+              </a:ext>
+            </a:extLst>
+          </p:cNvPr>
+          <p:cNvPicPr>
+            <a:picLocks noChangeAspect="1"/>
+          </p:cNvPicPr>
+          <p:nvPr/>
+        </p:nvPicPr>
+        <p:blipFill>
+          <a:blip r:embed="rId2">
+            <a:extLst>
+              <a:ext uri="{96DAC541-7B7A-43D3-8B79-37D633B846F1}">
+                <asvg:svgBlip xmlns:asvg="http://schemas.microsoft.com/office/drawing/2016/SVG/main" r:embed="rId3"/>
+              </a:ext>
+            </a:extLst>
+          </a:blip>
+          <a:stretch>
+            <a:fillRect/>
+          </a:stretch>
+        </p:blipFill>
+        <p:spPr>
+          <a:xfrm>
+            <a:off x="457200" y="548265"/>
+            <a:ext cx="595746" cy="595746"/>
+          </a:xfrm>
+          <a:prstGeom prst="rect">
+            <a:avLst/>
+          </a:prstGeom>
+        </p:spPr>
+      </p:pic>
+    </p:spTree>
   </p:cSld>
   <p:clrMapOvr>
     <a:masterClrMapping/>
@@ -5185,231 +5507,8 @@
           <a:lstStyle/>
           <a:p>
             <a:r>
-              <a:t>Scenarios and Use Cases</a:t>
-            </a:r>
-          </a:p>
-        </p:txBody>
-      </p:sp>
-      <p:sp>
-        <p:nvSpPr>
-          <p:cNvPr id="3" name="Content Placeholder 2"/>
-          <p:cNvSpPr>
-            <a:spLocks noGrp="1"/>
-          </p:cNvSpPr>
-          <p:nvPr>
-            <p:ph idx="1"/>
-          </p:nvPr>
-        </p:nvSpPr>
-        <p:spPr/>
-        <p:txBody>
-          <a:bodyPr>
-            <a:normAutofit/>
-          </a:bodyPr>
-          <a:lstStyle/>
-          <a:p>
-            <a:r>
-              <a:rPr dirty="0"/>
-              <a:t>Generic containers and algorithms</a:t>
-            </a:r>
-          </a:p>
-          <a:p>
-            <a:r>
-              <a:rPr dirty="0"/>
-              <a:t>Type-safe operations</a:t>
-            </a:r>
-          </a:p>
-          <a:p>
-            <a:r>
-              <a:rPr dirty="0"/>
-              <a:t>Code reuse and abstraction</a:t>
-            </a:r>
-          </a:p>
-          <a:p>
-            <a:r>
-              <a:rPr dirty="0"/>
-              <a:t>Custom behavior for specific types</a:t>
-            </a:r>
-            <a:endParaRPr lang="en-IN" dirty="0"/>
-          </a:p>
-          <a:p>
-            <a:r>
               <a:rPr lang="en-IN" dirty="0"/>
-              <a:t>Default Template Arguments</a:t>
-            </a:r>
-          </a:p>
-          <a:p>
-            <a:endParaRPr lang="en-IN" dirty="0"/>
-          </a:p>
-        </p:txBody>
-      </p:sp>
-    </p:spTree>
-  </p:cSld>
-  <p:clrMapOvr>
-    <a:masterClrMapping/>
-  </p:clrMapOvr>
-</p:sld>
-</file>
-
-<file path=ppt/slides/slide15.xml><?xml version="1.0" encoding="utf-8"?>
-<p:sld xmlns:a="http://schemas.openxmlformats.org/drawingml/2006/main" xmlns:r="http://schemas.openxmlformats.org/officeDocument/2006/relationships" xmlns:p="http://schemas.openxmlformats.org/presentationml/2006/main">
-  <p:cSld>
-    <p:spTree>
-      <p:nvGrpSpPr>
-        <p:cNvPr id="1" name=""/>
-        <p:cNvGrpSpPr/>
-        <p:nvPr/>
-      </p:nvGrpSpPr>
-      <p:grpSpPr>
-        <a:xfrm>
-          <a:off x="0" y="0"/>
-          <a:ext cx="0" cy="0"/>
-          <a:chOff x="0" y="0"/>
-          <a:chExt cx="0" cy="0"/>
-        </a:xfrm>
-      </p:grpSpPr>
-      <p:sp>
-        <p:nvSpPr>
-          <p:cNvPr id="2" name="Title 1"/>
-          <p:cNvSpPr>
-            <a:spLocks noGrp="1"/>
-          </p:cNvSpPr>
-          <p:nvPr>
-            <p:ph type="title"/>
-          </p:nvPr>
-        </p:nvSpPr>
-        <p:spPr/>
-        <p:txBody>
-          <a:bodyPr/>
-          <a:lstStyle/>
-          <a:p>
-            <a:r>
-              <a:t>Limitations and Best Practices</a:t>
-            </a:r>
-          </a:p>
-        </p:txBody>
-      </p:sp>
-      <p:sp>
-        <p:nvSpPr>
-          <p:cNvPr id="3" name="Content Placeholder 2"/>
-          <p:cNvSpPr>
-            <a:spLocks noGrp="1"/>
-          </p:cNvSpPr>
-          <p:nvPr>
-            <p:ph idx="1"/>
-          </p:nvPr>
-        </p:nvSpPr>
-        <p:spPr/>
-        <p:txBody>
-          <a:bodyPr>
-            <a:normAutofit lnSpcReduction="10000"/>
-          </a:bodyPr>
-          <a:lstStyle/>
-          <a:p>
-            <a:r>
-              <a:rPr dirty="0"/>
-              <a:t>Limitations:</a:t>
-            </a:r>
-          </a:p>
-          <a:p>
-            <a:pPr lvl="1"/>
-            <a:r>
-              <a:rPr dirty="0"/>
-              <a:t>Increased complexity</a:t>
-            </a:r>
-          </a:p>
-          <a:p>
-            <a:pPr lvl="1"/>
-            <a:r>
-              <a:rPr dirty="0"/>
-              <a:t>Code duplication risk</a:t>
-            </a:r>
-            <a:endParaRPr lang="en-IN" dirty="0"/>
-          </a:p>
-          <a:p>
-            <a:pPr lvl="1"/>
-            <a:r>
-              <a:rPr lang="en-IN" dirty="0"/>
-              <a:t>Template Specialization for Variable not allowed</a:t>
-            </a:r>
-            <a:endParaRPr dirty="0"/>
-          </a:p>
-          <a:p>
-            <a:endParaRPr dirty="0"/>
-          </a:p>
-          <a:p>
-            <a:r>
-              <a:rPr dirty="0"/>
-              <a:t>Best Practices:</a:t>
-            </a:r>
-            <a:endParaRPr lang="en-IN" dirty="0"/>
-          </a:p>
-          <a:p>
-            <a:pPr lvl="1"/>
-            <a:r>
-              <a:rPr lang="en-IN" dirty="0"/>
-              <a:t>Use templates for generic behavior</a:t>
-            </a:r>
-            <a:endParaRPr dirty="0"/>
-          </a:p>
-          <a:p>
-            <a:pPr lvl="1"/>
-            <a:r>
-              <a:rPr dirty="0"/>
-              <a:t>Use specialization only when necessary</a:t>
-            </a:r>
-          </a:p>
-          <a:p>
-            <a:pPr lvl="1"/>
-            <a:r>
-              <a:rPr dirty="0"/>
-              <a:t>Prefer partial over full specialization</a:t>
-            </a:r>
-          </a:p>
-        </p:txBody>
-      </p:sp>
-    </p:spTree>
-  </p:cSld>
-  <p:clrMapOvr>
-    <a:masterClrMapping/>
-  </p:clrMapOvr>
-</p:sld>
-</file>
-
-<file path=ppt/slides/slide16.xml><?xml version="1.0" encoding="utf-8"?>
-<p:sld xmlns:a="http://schemas.openxmlformats.org/drawingml/2006/main" xmlns:r="http://schemas.openxmlformats.org/officeDocument/2006/relationships" xmlns:p="http://schemas.openxmlformats.org/presentationml/2006/main">
-  <p:cSld>
-    <p:spTree>
-      <p:nvGrpSpPr>
-        <p:cNvPr id="1" name=""/>
-        <p:cNvGrpSpPr/>
-        <p:nvPr/>
-      </p:nvGrpSpPr>
-      <p:grpSpPr>
-        <a:xfrm>
-          <a:off x="0" y="0"/>
-          <a:ext cx="0" cy="0"/>
-          <a:chOff x="0" y="0"/>
-          <a:chExt cx="0" cy="0"/>
-        </a:xfrm>
-      </p:grpSpPr>
-      <p:sp>
-        <p:nvSpPr>
-          <p:cNvPr id="2" name="Title 1"/>
-          <p:cNvSpPr>
-            <a:spLocks noGrp="1"/>
-          </p:cNvSpPr>
-          <p:nvPr>
-            <p:ph type="title"/>
-          </p:nvPr>
-        </p:nvSpPr>
-        <p:spPr/>
-        <p:txBody>
-          <a:bodyPr/>
-          <a:lstStyle/>
-          <a:p>
-            <a:r>
-              <a:rPr lang="en-IN" dirty="0"/>
-              <a:t>Thanks</a:t>
+              <a:t>Thank You</a:t>
             </a:r>
             <a:endParaRPr dirty="0"/>
           </a:p>
@@ -5430,7 +5529,7 @@
         <p:spPr>
           <a:xfrm>
             <a:off x="1311007" y="5201794"/>
-            <a:ext cx="6521986" cy="923330"/>
+            <a:ext cx="6521986" cy="646331"/>
           </a:xfrm>
           <a:prstGeom prst="rect">
             <a:avLst/>
@@ -5460,11 +5559,80 @@
             </a:r>
             <a:endParaRPr lang="en-IN" dirty="0"/>
           </a:p>
-          <a:p>
-            <a:endParaRPr lang="en-IN" dirty="0"/>
-          </a:p>
-        </p:txBody>
-      </p:sp>
+        </p:txBody>
+      </p:sp>
+      <p:pic>
+        <p:nvPicPr>
+          <p:cNvPr id="3" name="Graphic 2" descr="Programmer male outline">
+            <a:extLst>
+              <a:ext uri="{FF2B5EF4-FFF2-40B4-BE49-F238E27FC236}">
+                <a16:creationId xmlns:a16="http://schemas.microsoft.com/office/drawing/2014/main" id="{D18288F2-3AD5-647A-1B67-8DF545FA5ECA}"/>
+              </a:ext>
+            </a:extLst>
+          </p:cNvPr>
+          <p:cNvPicPr>
+            <a:picLocks noChangeAspect="1"/>
+          </p:cNvPicPr>
+          <p:nvPr/>
+        </p:nvPicPr>
+        <p:blipFill>
+          <a:blip r:embed="rId4">
+            <a:extLst>
+              <a:ext uri="{96DAC541-7B7A-43D3-8B79-37D633B846F1}">
+                <asvg:svgBlip xmlns:asvg="http://schemas.microsoft.com/office/drawing/2016/SVG/main" r:embed="rId5"/>
+              </a:ext>
+            </a:extLst>
+          </a:blip>
+          <a:stretch>
+            <a:fillRect/>
+          </a:stretch>
+        </p:blipFill>
+        <p:spPr>
+          <a:xfrm>
+            <a:off x="457200" y="548265"/>
+            <a:ext cx="595746" cy="595746"/>
+          </a:xfrm>
+          <a:prstGeom prst="rect">
+            <a:avLst/>
+          </a:prstGeom>
+        </p:spPr>
+      </p:pic>
+      <p:pic>
+        <p:nvPicPr>
+          <p:cNvPr id="4" name="Graphic 3" descr="Programmer male with solid fill">
+            <a:extLst>
+              <a:ext uri="{FF2B5EF4-FFF2-40B4-BE49-F238E27FC236}">
+                <a16:creationId xmlns:a16="http://schemas.microsoft.com/office/drawing/2014/main" id="{F68344D2-5FC0-7521-4653-42E4BDA5797C}"/>
+              </a:ext>
+            </a:extLst>
+          </p:cNvPr>
+          <p:cNvPicPr>
+            <a:picLocks noChangeAspect="1"/>
+          </p:cNvPicPr>
+          <p:nvPr/>
+        </p:nvPicPr>
+        <p:blipFill>
+          <a:blip r:embed="rId6">
+            <a:extLst>
+              <a:ext uri="{96DAC541-7B7A-43D3-8B79-37D633B846F1}">
+                <asvg:svgBlip xmlns:asvg="http://schemas.microsoft.com/office/drawing/2016/SVG/main" r:embed="rId7"/>
+              </a:ext>
+            </a:extLst>
+          </a:blip>
+          <a:stretch>
+            <a:fillRect/>
+          </a:stretch>
+        </p:blipFill>
+        <p:spPr>
+          <a:xfrm>
+            <a:off x="8091054" y="548265"/>
+            <a:ext cx="595746" cy="595746"/>
+          </a:xfrm>
+          <a:prstGeom prst="rect">
+            <a:avLst/>
+          </a:prstGeom>
+        </p:spPr>
+      </p:pic>
     </p:spTree>
   </p:cSld>
   <p:clrMapOvr>
@@ -5500,15 +5668,19 @@
             <p:ph type="title"/>
           </p:nvPr>
         </p:nvSpPr>
-        <p:spPr/>
-        <p:txBody>
-          <a:bodyPr/>
-          <a:lstStyle/>
-          <a:p>
-            <a:pPr algn="l">
-              <a:lnSpc>
-                <a:spcPts val="2100"/>
-              </a:lnSpc>
+        <p:spPr>
+          <a:xfrm>
+            <a:off x="457200" y="274638"/>
+            <a:ext cx="8229600" cy="1143000"/>
+          </a:xfrm>
+        </p:spPr>
+        <p:txBody>
+          <a:bodyPr anchor="ctr">
+            <a:normAutofit/>
+          </a:bodyPr>
+          <a:lstStyle/>
+          <a:p>
+            <a:pPr>
               <a:spcBef>
                 <a:spcPts val="975"/>
               </a:spcBef>
@@ -5519,11 +5691,7 @@
             </a:pPr>
             <a:r>
               <a:rPr lang="en-IN" b="1" i="0" dirty="0">
-                <a:solidFill>
-                  <a:srgbClr val="424242"/>
-                </a:solidFill>
                 <a:effectLst/>
-                <a:latin typeface="Segoe Sans"/>
               </a:rPr>
               <a:t>📘 What's Included:</a:t>
             </a:r>
@@ -5537,17 +5705,25 @@
             <a:spLocks noGrp="1"/>
           </p:cNvSpPr>
           <p:nvPr>
-            <p:ph idx="1"/>
-          </p:nvPr>
-        </p:nvSpPr>
-        <p:spPr/>
+            <p:ph sz="half" idx="1"/>
+          </p:nvPr>
+        </p:nvSpPr>
+        <p:spPr>
+          <a:xfrm>
+            <a:off x="457200" y="1600200"/>
+            <a:ext cx="4038600" cy="4525963"/>
+          </a:xfrm>
+        </p:spPr>
         <p:txBody>
           <a:bodyPr>
             <a:normAutofit/>
           </a:bodyPr>
           <a:lstStyle/>
           <a:p>
-            <a:pPr algn="l">
+            <a:pPr>
+              <a:lnSpc>
+                <a:spcPct val="90000"/>
+              </a:lnSpc>
               <a:spcBef>
                 <a:spcPts val="300"/>
               </a:spcBef>
@@ -5558,10 +5734,7 @@
               <a:buChar char="•"/>
             </a:pPr>
             <a:r>
-              <a:rPr lang="en-IN" b="0" i="0" dirty="0">
-                <a:solidFill>
-                  <a:srgbClr val="424242"/>
-                </a:solidFill>
+              <a:rPr lang="en-IN" sz="2400" b="0" i="0" dirty="0">
                 <a:effectLst/>
               </a:rPr>
               <a:t>Introduction</a:t>
@@ -5569,6 +5742,9 @@
           </a:p>
           <a:p>
             <a:pPr>
+              <a:lnSpc>
+                <a:spcPct val="90000"/>
+              </a:lnSpc>
               <a:spcBef>
                 <a:spcPts val="300"/>
               </a:spcBef>
@@ -5579,51 +5755,37 @@
               <a:buChar char="•"/>
             </a:pPr>
             <a:r>
-              <a:rPr lang="en-IN" b="0" i="0" dirty="0">
-                <a:solidFill>
-                  <a:srgbClr val="424242"/>
-                </a:solidFill>
+              <a:rPr lang="en-IN" sz="2400" b="0" i="0" dirty="0">
                 <a:effectLst/>
               </a:rPr>
               <a:t>Function, </a:t>
             </a:r>
             <a:r>
-              <a:rPr lang="en-IN" dirty="0">
-                <a:solidFill>
-                  <a:srgbClr val="424242"/>
-                </a:solidFill>
-              </a:rPr>
+              <a:rPr lang="en-IN" sz="2400" dirty="0"/>
               <a:t>C</a:t>
             </a:r>
             <a:r>
-              <a:rPr lang="en-IN" b="0" i="0" dirty="0">
-                <a:solidFill>
-                  <a:srgbClr val="424242"/>
-                </a:solidFill>
+              <a:rPr lang="en-IN" sz="2400" b="0" i="0" dirty="0">
                 <a:effectLst/>
               </a:rPr>
               <a:t>lass and </a:t>
             </a:r>
             <a:r>
-              <a:rPr lang="en-IN" dirty="0">
-                <a:solidFill>
-                  <a:srgbClr val="424242"/>
-                </a:solidFill>
-              </a:rPr>
+              <a:rPr lang="en-IN" sz="2400" dirty="0"/>
               <a:t>Variable </a:t>
             </a:r>
             <a:r>
-              <a:rPr lang="en-IN" b="0" i="0" dirty="0">
-                <a:solidFill>
-                  <a:srgbClr val="424242"/>
-                </a:solidFill>
+              <a:rPr lang="en-IN" sz="2400" b="0" i="0" dirty="0">
                 <a:effectLst/>
               </a:rPr>
               <a:t>templates</a:t>
             </a:r>
           </a:p>
           <a:p>
-            <a:pPr algn="l">
+            <a:pPr>
+              <a:lnSpc>
+                <a:spcPct val="90000"/>
+              </a:lnSpc>
               <a:spcBef>
                 <a:spcPts val="300"/>
               </a:spcBef>
@@ -5634,17 +5796,17 @@
               <a:buChar char="•"/>
             </a:pPr>
             <a:r>
-              <a:rPr lang="en-IN" b="0" i="0" dirty="0">
-                <a:solidFill>
-                  <a:srgbClr val="424242"/>
-                </a:solidFill>
+              <a:rPr lang="en-IN" sz="2400" b="0" i="0" dirty="0">
                 <a:effectLst/>
               </a:rPr>
-              <a:t>Template parameters (type, non-type, template-template)</a:t>
-            </a:r>
-          </a:p>
-          <a:p>
-            <a:pPr algn="l">
+              <a:t>Template parameters (type, non-type, default)</a:t>
+            </a:r>
+          </a:p>
+          <a:p>
+            <a:pPr>
+              <a:lnSpc>
+                <a:spcPct val="90000"/>
+              </a:lnSpc>
               <a:spcBef>
                 <a:spcPts val="300"/>
               </a:spcBef>
@@ -5655,10 +5817,7 @@
               <a:buChar char="•"/>
             </a:pPr>
             <a:r>
-              <a:rPr lang="en-IN" b="0" i="0" dirty="0">
-                <a:solidFill>
-                  <a:srgbClr val="424242"/>
-                </a:solidFill>
+              <a:rPr lang="en-IN" sz="2400" b="0" i="0" dirty="0">
                 <a:effectLst/>
               </a:rPr>
               <a:t>Template specialization</a:t>
@@ -5666,6 +5825,9 @@
           </a:p>
           <a:p>
             <a:pPr lvl="1">
+              <a:lnSpc>
+                <a:spcPct val="90000"/>
+              </a:lnSpc>
               <a:spcBef>
                 <a:spcPts val="300"/>
               </a:spcBef>
@@ -5677,16 +5839,16 @@
             </a:pPr>
             <a:r>
               <a:rPr lang="en-IN" b="0" i="0" dirty="0">
-                <a:solidFill>
-                  <a:srgbClr val="424242"/>
-                </a:solidFill>
                 <a:effectLst/>
               </a:rPr>
-              <a:t>Full, partial and Function template specialization</a:t>
-            </a:r>
-          </a:p>
-          <a:p>
-            <a:pPr algn="l">
+              <a:t>Full, partial template specialization</a:t>
+            </a:r>
+          </a:p>
+          <a:p>
+            <a:pPr>
+              <a:lnSpc>
+                <a:spcPct val="90000"/>
+              </a:lnSpc>
               <a:spcBef>
                 <a:spcPts val="300"/>
               </a:spcBef>
@@ -5697,10 +5859,7 @@
               <a:buChar char="•"/>
             </a:pPr>
             <a:r>
-              <a:rPr lang="en-IN" b="0" i="0" dirty="0">
-                <a:solidFill>
-                  <a:srgbClr val="424242"/>
-                </a:solidFill>
+              <a:rPr lang="en-IN" sz="2400" b="0" i="0" dirty="0">
                 <a:effectLst/>
               </a:rPr>
               <a:t>Use cases and best practices</a:t>
@@ -5708,6 +5867,42 @@
           </a:p>
         </p:txBody>
       </p:sp>
+      <p:pic>
+        <p:nvPicPr>
+          <p:cNvPr id="4" name="Graphic 3" descr="Programmer male outline">
+            <a:extLst>
+              <a:ext uri="{FF2B5EF4-FFF2-40B4-BE49-F238E27FC236}">
+                <a16:creationId xmlns:a16="http://schemas.microsoft.com/office/drawing/2014/main" id="{147CD213-1CD7-C1A2-1B5B-904C95561A9F}"/>
+              </a:ext>
+            </a:extLst>
+          </p:cNvPr>
+          <p:cNvPicPr>
+            <a:picLocks noChangeAspect="1"/>
+          </p:cNvPicPr>
+          <p:nvPr/>
+        </p:nvPicPr>
+        <p:blipFill>
+          <a:blip r:embed="rId3">
+            <a:extLst>
+              <a:ext uri="{96DAC541-7B7A-43D3-8B79-37D633B846F1}">
+                <asvg:svgBlip xmlns:asvg="http://schemas.microsoft.com/office/drawing/2016/SVG/main" r:embed="rId4"/>
+              </a:ext>
+            </a:extLst>
+          </a:blip>
+          <a:stretch>
+            <a:fillRect/>
+          </a:stretch>
+        </p:blipFill>
+        <p:spPr>
+          <a:xfrm>
+            <a:off x="5447146" y="1600200"/>
+            <a:ext cx="3239655" cy="3239655"/>
+          </a:xfrm>
+          <a:prstGeom prst="rect">
+            <a:avLst/>
+          </a:prstGeom>
+        </p:spPr>
+      </p:pic>
     </p:spTree>
   </p:cSld>
   <p:clrMapOvr>
@@ -5755,12 +5950,21 @@
             <p:ph type="title"/>
           </p:nvPr>
         </p:nvSpPr>
-        <p:spPr/>
-        <p:txBody>
-          <a:bodyPr/>
-          <a:lstStyle/>
-          <a:p>
-            <a:r>
+        <p:spPr>
+          <a:xfrm>
+            <a:off x="1052946" y="274638"/>
+            <a:ext cx="7633854" cy="1143000"/>
+          </a:xfrm>
+        </p:spPr>
+        <p:txBody>
+          <a:bodyPr>
+            <a:normAutofit/>
+          </a:bodyPr>
+          <a:lstStyle/>
+          <a:p>
+            <a:pPr algn="l"/>
+            <a:r>
+              <a:rPr dirty="0"/>
               <a:t>Introduction to C++ Templates</a:t>
             </a:r>
           </a:p>
@@ -5894,6 +6098,42 @@
           </a:p>
         </p:txBody>
       </p:sp>
+      <p:pic>
+        <p:nvPicPr>
+          <p:cNvPr id="4" name="Graphic 3" descr="Programmer male outline">
+            <a:extLst>
+              <a:ext uri="{FF2B5EF4-FFF2-40B4-BE49-F238E27FC236}">
+                <a16:creationId xmlns:a16="http://schemas.microsoft.com/office/drawing/2014/main" id="{0B747E61-C2F0-419C-DA54-75EE79577CFD}"/>
+              </a:ext>
+            </a:extLst>
+          </p:cNvPr>
+          <p:cNvPicPr>
+            <a:picLocks noChangeAspect="1"/>
+          </p:cNvPicPr>
+          <p:nvPr/>
+        </p:nvPicPr>
+        <p:blipFill>
+          <a:blip r:embed="rId3">
+            <a:extLst>
+              <a:ext uri="{96DAC541-7B7A-43D3-8B79-37D633B846F1}">
+                <asvg:svgBlip xmlns:asvg="http://schemas.microsoft.com/office/drawing/2016/SVG/main" r:embed="rId4"/>
+              </a:ext>
+            </a:extLst>
+          </a:blip>
+          <a:stretch>
+            <a:fillRect/>
+          </a:stretch>
+        </p:blipFill>
+        <p:spPr>
+          <a:xfrm>
+            <a:off x="457200" y="548265"/>
+            <a:ext cx="595746" cy="595746"/>
+          </a:xfrm>
+          <a:prstGeom prst="rect">
+            <a:avLst/>
+          </a:prstGeom>
+        </p:spPr>
+      </p:pic>
     </p:spTree>
     <p:extLst>
       <p:ext uri="{BB962C8B-B14F-4D97-AF65-F5344CB8AC3E}">
@@ -5908,454 +6148,6 @@
 </file>
 
 <file path=ppt/slides/slide4.xml><?xml version="1.0" encoding="utf-8"?>
-<p:sld xmlns:a="http://schemas.openxmlformats.org/drawingml/2006/main" xmlns:r="http://schemas.openxmlformats.org/officeDocument/2006/relationships" xmlns:p="http://schemas.openxmlformats.org/presentationml/2006/main">
-  <p:cSld>
-    <p:spTree>
-      <p:nvGrpSpPr>
-        <p:cNvPr id="1" name=""/>
-        <p:cNvGrpSpPr/>
-        <p:nvPr/>
-      </p:nvGrpSpPr>
-      <p:grpSpPr>
-        <a:xfrm>
-          <a:off x="0" y="0"/>
-          <a:ext cx="0" cy="0"/>
-          <a:chOff x="0" y="0"/>
-          <a:chExt cx="0" cy="0"/>
-        </a:xfrm>
-      </p:grpSpPr>
-      <p:sp>
-        <p:nvSpPr>
-          <p:cNvPr id="2" name="Title 1"/>
-          <p:cNvSpPr>
-            <a:spLocks noGrp="1"/>
-          </p:cNvSpPr>
-          <p:nvPr>
-            <p:ph type="title"/>
-          </p:nvPr>
-        </p:nvSpPr>
-        <p:spPr/>
-        <p:txBody>
-          <a:bodyPr/>
-          <a:lstStyle/>
-          <a:p>
-            <a:r>
-              <a:t>Function Templates</a:t>
-            </a:r>
-          </a:p>
-        </p:txBody>
-      </p:sp>
-      <p:sp>
-        <p:nvSpPr>
-          <p:cNvPr id="3" name="Content Placeholder 2"/>
-          <p:cNvSpPr>
-            <a:spLocks noGrp="1"/>
-          </p:cNvSpPr>
-          <p:nvPr>
-            <p:ph idx="1"/>
-          </p:nvPr>
-        </p:nvSpPr>
-        <p:spPr/>
-        <p:txBody>
-          <a:bodyPr/>
-          <a:lstStyle/>
-          <a:p>
-            <a:r>
-              <a:rPr dirty="0"/>
-              <a:t>Used to define a generic function.</a:t>
-            </a:r>
-          </a:p>
-          <a:p>
-            <a:endParaRPr lang="en-IN" dirty="0"/>
-          </a:p>
-          <a:p>
-            <a:r>
-              <a:rPr dirty="0"/>
-              <a:t>Example:</a:t>
-            </a:r>
-          </a:p>
-          <a:p>
-            <a:pPr marL="0" indent="0">
-              <a:buNone/>
-            </a:pPr>
-            <a:r>
-              <a:rPr lang="en-IN" dirty="0"/>
-              <a:t>	</a:t>
-            </a:r>
-            <a:r>
-              <a:rPr dirty="0"/>
-              <a:t>template&lt;</a:t>
-            </a:r>
-            <a:r>
-              <a:rPr dirty="0" err="1"/>
-              <a:t>typename</a:t>
-            </a:r>
-            <a:r>
-              <a:rPr dirty="0"/>
-              <a:t> T&gt; </a:t>
-            </a:r>
-            <a:endParaRPr lang="en-IN" dirty="0"/>
-          </a:p>
-          <a:p>
-            <a:pPr marL="0" indent="0">
-              <a:buNone/>
-            </a:pPr>
-            <a:r>
-              <a:rPr lang="en-IN" dirty="0"/>
-              <a:t>	</a:t>
-            </a:r>
-            <a:r>
-              <a:rPr dirty="0"/>
-              <a:t>T add(T a, T b) { </a:t>
-            </a:r>
-            <a:endParaRPr lang="en-IN" dirty="0"/>
-          </a:p>
-          <a:p>
-            <a:pPr marL="0" indent="0">
-              <a:buNone/>
-            </a:pPr>
-            <a:r>
-              <a:rPr lang="en-IN" dirty="0"/>
-              <a:t>		</a:t>
-            </a:r>
-            <a:r>
-              <a:rPr dirty="0"/>
-              <a:t>return a + b; </a:t>
-            </a:r>
-            <a:endParaRPr lang="en-IN" dirty="0"/>
-          </a:p>
-          <a:p>
-            <a:pPr marL="0" indent="0">
-              <a:buNone/>
-            </a:pPr>
-            <a:r>
-              <a:rPr lang="en-IN" dirty="0"/>
-              <a:t>	</a:t>
-            </a:r>
-            <a:r>
-              <a:rPr dirty="0"/>
-              <a:t>}</a:t>
-            </a:r>
-          </a:p>
-        </p:txBody>
-      </p:sp>
-    </p:spTree>
-  </p:cSld>
-  <p:clrMapOvr>
-    <a:masterClrMapping/>
-  </p:clrMapOvr>
-</p:sld>
-</file>
-
-<file path=ppt/slides/slide5.xml><?xml version="1.0" encoding="utf-8"?>
-<p:sld xmlns:a="http://schemas.openxmlformats.org/drawingml/2006/main" xmlns:r="http://schemas.openxmlformats.org/officeDocument/2006/relationships" xmlns:p="http://schemas.openxmlformats.org/presentationml/2006/main">
-  <p:cSld>
-    <p:spTree>
-      <p:nvGrpSpPr>
-        <p:cNvPr id="1" name=""/>
-        <p:cNvGrpSpPr/>
-        <p:nvPr/>
-      </p:nvGrpSpPr>
-      <p:grpSpPr>
-        <a:xfrm>
-          <a:off x="0" y="0"/>
-          <a:ext cx="0" cy="0"/>
-          <a:chOff x="0" y="0"/>
-          <a:chExt cx="0" cy="0"/>
-        </a:xfrm>
-      </p:grpSpPr>
-      <p:sp>
-        <p:nvSpPr>
-          <p:cNvPr id="2" name="Title 1"/>
-          <p:cNvSpPr>
-            <a:spLocks noGrp="1"/>
-          </p:cNvSpPr>
-          <p:nvPr>
-            <p:ph type="title"/>
-          </p:nvPr>
-        </p:nvSpPr>
-        <p:spPr/>
-        <p:txBody>
-          <a:bodyPr/>
-          <a:lstStyle/>
-          <a:p>
-            <a:r>
-              <a:t>Class Templates</a:t>
-            </a:r>
-          </a:p>
-        </p:txBody>
-      </p:sp>
-      <p:sp>
-        <p:nvSpPr>
-          <p:cNvPr id="3" name="Content Placeholder 2"/>
-          <p:cNvSpPr>
-            <a:spLocks noGrp="1"/>
-          </p:cNvSpPr>
-          <p:nvPr>
-            <p:ph idx="1"/>
-          </p:nvPr>
-        </p:nvSpPr>
-        <p:spPr/>
-        <p:txBody>
-          <a:bodyPr>
-            <a:normAutofit fontScale="92500" lnSpcReduction="10000"/>
-          </a:bodyPr>
-          <a:lstStyle/>
-          <a:p>
-            <a:r>
-              <a:rPr dirty="0"/>
-              <a:t>Used to define a generic class.</a:t>
-            </a:r>
-            <a:endParaRPr lang="en-IN" dirty="0"/>
-          </a:p>
-          <a:p>
-            <a:r>
-              <a:rPr lang="en-IN" dirty="0"/>
-              <a:t>useful for classes like LinkedList, </a:t>
-            </a:r>
-            <a:r>
-              <a:rPr lang="en-IN" dirty="0" err="1"/>
-              <a:t>BinaryTree</a:t>
-            </a:r>
-            <a:r>
-              <a:rPr lang="en-IN" dirty="0"/>
-              <a:t>, Stack, Queue, Array, etc.</a:t>
-            </a:r>
-            <a:endParaRPr dirty="0"/>
-          </a:p>
-          <a:p>
-            <a:endParaRPr lang="en-IN" dirty="0"/>
-          </a:p>
-          <a:p>
-            <a:r>
-              <a:rPr dirty="0"/>
-              <a:t>Example:</a:t>
-            </a:r>
-          </a:p>
-          <a:p>
-            <a:pPr marL="0" indent="0">
-              <a:buNone/>
-            </a:pPr>
-            <a:r>
-              <a:rPr lang="en-IN" dirty="0"/>
-              <a:t>	</a:t>
-            </a:r>
-            <a:r>
-              <a:rPr dirty="0"/>
-              <a:t>template&lt;typename T&gt; </a:t>
-            </a:r>
-            <a:endParaRPr lang="en-IN" dirty="0"/>
-          </a:p>
-          <a:p>
-            <a:pPr marL="0" indent="0">
-              <a:buNone/>
-            </a:pPr>
-            <a:r>
-              <a:rPr lang="en-IN" dirty="0"/>
-              <a:t>	</a:t>
-            </a:r>
-            <a:r>
-              <a:rPr dirty="0"/>
-              <a:t>class Box { </a:t>
-            </a:r>
-            <a:endParaRPr lang="en-IN" dirty="0"/>
-          </a:p>
-          <a:p>
-            <a:pPr marL="0" indent="0">
-              <a:buNone/>
-            </a:pPr>
-            <a:r>
-              <a:rPr lang="en-IN" dirty="0"/>
-              <a:t>		</a:t>
-            </a:r>
-            <a:r>
-              <a:rPr dirty="0"/>
-              <a:t>T value; </a:t>
-            </a:r>
-            <a:endParaRPr lang="en-IN" dirty="0"/>
-          </a:p>
-          <a:p>
-            <a:pPr marL="0" indent="0">
-              <a:buNone/>
-            </a:pPr>
-            <a:r>
-              <a:rPr lang="en-IN" dirty="0"/>
-              <a:t>	</a:t>
-            </a:r>
-            <a:r>
-              <a:rPr dirty="0"/>
-              <a:t>};</a:t>
-            </a:r>
-          </a:p>
-        </p:txBody>
-      </p:sp>
-    </p:spTree>
-  </p:cSld>
-  <p:clrMapOvr>
-    <a:masterClrMapping/>
-  </p:clrMapOvr>
-</p:sld>
-</file>
-
-<file path=ppt/slides/slide6.xml><?xml version="1.0" encoding="utf-8"?>
-<p:sld xmlns:a="http://schemas.openxmlformats.org/drawingml/2006/main" xmlns:r="http://schemas.openxmlformats.org/officeDocument/2006/relationships" xmlns:p="http://schemas.openxmlformats.org/presentationml/2006/main">
-  <p:cSld>
-    <p:spTree>
-      <p:nvGrpSpPr>
-        <p:cNvPr id="1" name="">
-          <a:extLst>
-            <a:ext uri="{FF2B5EF4-FFF2-40B4-BE49-F238E27FC236}">
-              <a16:creationId xmlns:a16="http://schemas.microsoft.com/office/drawing/2014/main" id="{3A8366B4-9206-BDC6-1A19-9C7CFD4B7FE1}"/>
-            </a:ext>
-          </a:extLst>
-        </p:cNvPr>
-        <p:cNvGrpSpPr/>
-        <p:nvPr/>
-      </p:nvGrpSpPr>
-      <p:grpSpPr>
-        <a:xfrm>
-          <a:off x="0" y="0"/>
-          <a:ext cx="0" cy="0"/>
-          <a:chOff x="0" y="0"/>
-          <a:chExt cx="0" cy="0"/>
-        </a:xfrm>
-      </p:grpSpPr>
-      <p:sp>
-        <p:nvSpPr>
-          <p:cNvPr id="2" name="Title 1">
-            <a:extLst>
-              <a:ext uri="{FF2B5EF4-FFF2-40B4-BE49-F238E27FC236}">
-                <a16:creationId xmlns:a16="http://schemas.microsoft.com/office/drawing/2014/main" id="{F1C0063B-D596-A31C-9854-376E56C5B568}"/>
-              </a:ext>
-            </a:extLst>
-          </p:cNvPr>
-          <p:cNvSpPr>
-            <a:spLocks noGrp="1"/>
-          </p:cNvSpPr>
-          <p:nvPr>
-            <p:ph type="title"/>
-          </p:nvPr>
-        </p:nvSpPr>
-        <p:spPr/>
-        <p:txBody>
-          <a:bodyPr/>
-          <a:lstStyle/>
-          <a:p>
-            <a:r>
-              <a:rPr lang="en-IN" dirty="0"/>
-              <a:t>Variable</a:t>
-            </a:r>
-            <a:r>
-              <a:rPr dirty="0"/>
-              <a:t> Templates</a:t>
-            </a:r>
-            <a:r>
-              <a:rPr lang="en-IN" dirty="0"/>
-              <a:t> (Since C++14)</a:t>
-            </a:r>
-            <a:endParaRPr dirty="0"/>
-          </a:p>
-        </p:txBody>
-      </p:sp>
-      <p:sp>
-        <p:nvSpPr>
-          <p:cNvPr id="3" name="Content Placeholder 2">
-            <a:extLst>
-              <a:ext uri="{FF2B5EF4-FFF2-40B4-BE49-F238E27FC236}">
-                <a16:creationId xmlns:a16="http://schemas.microsoft.com/office/drawing/2014/main" id="{2C04D177-0944-E923-BAE7-4AF4691B6072}"/>
-              </a:ext>
-            </a:extLst>
-          </p:cNvPr>
-          <p:cNvSpPr>
-            <a:spLocks noGrp="1"/>
-          </p:cNvSpPr>
-          <p:nvPr>
-            <p:ph idx="1"/>
-          </p:nvPr>
-        </p:nvSpPr>
-        <p:spPr/>
-        <p:txBody>
-          <a:bodyPr>
-            <a:normAutofit lnSpcReduction="10000"/>
-          </a:bodyPr>
-          <a:lstStyle/>
-          <a:p>
-            <a:r>
-              <a:rPr dirty="0"/>
-              <a:t>Used to define a generic </a:t>
-            </a:r>
-            <a:r>
-              <a:rPr lang="en-IN" dirty="0"/>
-              <a:t>variable</a:t>
-            </a:r>
-            <a:r>
-              <a:rPr dirty="0"/>
-              <a:t>.</a:t>
-            </a:r>
-            <a:endParaRPr lang="en-IN" dirty="0"/>
-          </a:p>
-          <a:p>
-            <a:r>
-              <a:rPr lang="en-IN" dirty="0"/>
-              <a:t>Variable that can work with any type specified when the variable is used</a:t>
-            </a:r>
-            <a:endParaRPr dirty="0"/>
-          </a:p>
-          <a:p>
-            <a:endParaRPr lang="en-IN" dirty="0"/>
-          </a:p>
-          <a:p>
-            <a:endParaRPr lang="en-IN" dirty="0"/>
-          </a:p>
-          <a:p>
-            <a:r>
-              <a:rPr dirty="0"/>
-              <a:t>Example:</a:t>
-            </a:r>
-          </a:p>
-          <a:p>
-            <a:pPr marL="0" indent="0">
-              <a:buNone/>
-            </a:pPr>
-            <a:r>
-              <a:rPr lang="en-IN" dirty="0"/>
-              <a:t>	</a:t>
-            </a:r>
-            <a:r>
-              <a:rPr lang="fr-FR" dirty="0" err="1"/>
-              <a:t>template</a:t>
-            </a:r>
-            <a:r>
-              <a:rPr lang="fr-FR" dirty="0"/>
-              <a:t> &lt;typename T&gt; </a:t>
-            </a:r>
-          </a:p>
-          <a:p>
-            <a:pPr marL="0" indent="0">
-              <a:buNone/>
-            </a:pPr>
-            <a:r>
-              <a:rPr lang="fr-FR" dirty="0"/>
-              <a:t>	T pi = T(3.14159);</a:t>
-            </a:r>
-            <a:endParaRPr dirty="0"/>
-          </a:p>
-        </p:txBody>
-      </p:sp>
-    </p:spTree>
-    <p:extLst>
-      <p:ext uri="{BB962C8B-B14F-4D97-AF65-F5344CB8AC3E}">
-        <p14:creationId xmlns:p14="http://schemas.microsoft.com/office/powerpoint/2010/main" val="3457027147"/>
-      </p:ext>
-    </p:extLst>
-  </p:cSld>
-  <p:clrMapOvr>
-    <a:masterClrMapping/>
-  </p:clrMapOvr>
-</p:sld>
-</file>
-
-<file path=ppt/slides/slide7.xml><?xml version="1.0" encoding="utf-8"?>
 <p:sld xmlns:a="http://schemas.openxmlformats.org/drawingml/2006/main" xmlns:r="http://schemas.openxmlformats.org/officeDocument/2006/relationships" xmlns:p="http://schemas.openxmlformats.org/presentationml/2006/main">
   <p:cSld>
     <p:spTree>
@@ -6394,13 +6186,19 @@
             <p:ph type="title"/>
           </p:nvPr>
         </p:nvSpPr>
-        <p:spPr/>
+        <p:spPr>
+          <a:xfrm>
+            <a:off x="1052946" y="274638"/>
+            <a:ext cx="7633854" cy="1143000"/>
+          </a:xfrm>
+        </p:spPr>
         <p:txBody>
           <a:bodyPr>
             <a:normAutofit/>
           </a:bodyPr>
           <a:lstStyle/>
           <a:p>
+            <a:pPr algn="l"/>
             <a:r>
               <a:rPr lang="en-IN" dirty="0"/>
               <a:t>Working of Templates</a:t>
@@ -6438,7 +6236,7 @@
         </p:blipFill>
         <p:spPr bwMode="auto">
           <a:xfrm>
-            <a:off x="1336484" y="2316163"/>
+            <a:off x="457200" y="2316163"/>
             <a:ext cx="6471032" cy="3810000"/>
           </a:xfrm>
           <a:prstGeom prst="rect">
@@ -6484,18 +6282,640 @@
           </a:bodyPr>
           <a:lstStyle/>
           <a:p>
+            <a:pPr>
+              <a:buFont typeface="Wingdings" panose="05000000000000000000" pitchFamily="2" charset="2"/>
+              <a:buChar char="Ø"/>
+            </a:pPr>
             <a:r>
               <a:rPr lang="en-IN" dirty="0"/>
-              <a:t>expanded at compiler time</a:t>
+              <a:t>Expanded at compiler time</a:t>
             </a:r>
             <a:endParaRPr dirty="0"/>
           </a:p>
         </p:txBody>
       </p:sp>
+      <p:pic>
+        <p:nvPicPr>
+          <p:cNvPr id="5" name="Graphic 4" descr="Programmer male with solid fill">
+            <a:extLst>
+              <a:ext uri="{FF2B5EF4-FFF2-40B4-BE49-F238E27FC236}">
+                <a16:creationId xmlns:a16="http://schemas.microsoft.com/office/drawing/2014/main" id="{2D89D06C-057B-F9E6-0CD0-3BDBA0527CCE}"/>
+              </a:ext>
+            </a:extLst>
+          </p:cNvPr>
+          <p:cNvPicPr>
+            <a:picLocks noChangeAspect="1"/>
+          </p:cNvPicPr>
+          <p:nvPr/>
+        </p:nvPicPr>
+        <p:blipFill>
+          <a:blip r:embed="rId4">
+            <a:extLst>
+              <a:ext uri="{96DAC541-7B7A-43D3-8B79-37D633B846F1}">
+                <asvg:svgBlip xmlns:asvg="http://schemas.microsoft.com/office/drawing/2016/SVG/main" r:embed="rId5"/>
+              </a:ext>
+            </a:extLst>
+          </a:blip>
+          <a:stretch>
+            <a:fillRect/>
+          </a:stretch>
+        </p:blipFill>
+        <p:spPr>
+          <a:xfrm>
+            <a:off x="457200" y="548265"/>
+            <a:ext cx="595746" cy="595746"/>
+          </a:xfrm>
+          <a:prstGeom prst="rect">
+            <a:avLst/>
+          </a:prstGeom>
+        </p:spPr>
+      </p:pic>
     </p:spTree>
     <p:extLst>
       <p:ext uri="{BB962C8B-B14F-4D97-AF65-F5344CB8AC3E}">
         <p14:creationId xmlns:p14="http://schemas.microsoft.com/office/powerpoint/2010/main" val="3836814086"/>
+      </p:ext>
+    </p:extLst>
+  </p:cSld>
+  <p:clrMapOvr>
+    <a:masterClrMapping/>
+  </p:clrMapOvr>
+</p:sld>
+</file>
+
+<file path=ppt/slides/slide5.xml><?xml version="1.0" encoding="utf-8"?>
+<p:sld xmlns:a="http://schemas.openxmlformats.org/drawingml/2006/main" xmlns:r="http://schemas.openxmlformats.org/officeDocument/2006/relationships" xmlns:p="http://schemas.openxmlformats.org/presentationml/2006/main">
+  <p:cSld>
+    <p:spTree>
+      <p:nvGrpSpPr>
+        <p:cNvPr id="1" name=""/>
+        <p:cNvGrpSpPr/>
+        <p:nvPr/>
+      </p:nvGrpSpPr>
+      <p:grpSpPr>
+        <a:xfrm>
+          <a:off x="0" y="0"/>
+          <a:ext cx="0" cy="0"/>
+          <a:chOff x="0" y="0"/>
+          <a:chExt cx="0" cy="0"/>
+        </a:xfrm>
+      </p:grpSpPr>
+      <p:sp>
+        <p:nvSpPr>
+          <p:cNvPr id="2" name="Title 1"/>
+          <p:cNvSpPr>
+            <a:spLocks noGrp="1"/>
+          </p:cNvSpPr>
+          <p:nvPr>
+            <p:ph type="title"/>
+          </p:nvPr>
+        </p:nvSpPr>
+        <p:spPr>
+          <a:xfrm>
+            <a:off x="1052946" y="274638"/>
+            <a:ext cx="7633854" cy="1143000"/>
+          </a:xfrm>
+        </p:spPr>
+        <p:txBody>
+          <a:bodyPr>
+            <a:normAutofit/>
+          </a:bodyPr>
+          <a:lstStyle/>
+          <a:p>
+            <a:pPr algn="l"/>
+            <a:r>
+              <a:rPr dirty="0"/>
+              <a:t>Function Templates</a:t>
+            </a:r>
+          </a:p>
+        </p:txBody>
+      </p:sp>
+      <p:sp>
+        <p:nvSpPr>
+          <p:cNvPr id="3" name="Content Placeholder 2"/>
+          <p:cNvSpPr>
+            <a:spLocks noGrp="1"/>
+          </p:cNvSpPr>
+          <p:nvPr>
+            <p:ph idx="1"/>
+          </p:nvPr>
+        </p:nvSpPr>
+        <p:spPr/>
+        <p:txBody>
+          <a:bodyPr/>
+          <a:lstStyle/>
+          <a:p>
+            <a:r>
+              <a:rPr dirty="0"/>
+              <a:t>Used to define a generic function.</a:t>
+            </a:r>
+          </a:p>
+          <a:p>
+            <a:endParaRPr lang="en-IN" dirty="0"/>
+          </a:p>
+          <a:p>
+            <a:r>
+              <a:rPr dirty="0"/>
+              <a:t>Example:</a:t>
+            </a:r>
+          </a:p>
+          <a:p>
+            <a:pPr marL="0" indent="0">
+              <a:buNone/>
+            </a:pPr>
+            <a:r>
+              <a:rPr lang="en-IN" dirty="0"/>
+              <a:t>	</a:t>
+            </a:r>
+            <a:r>
+              <a:rPr dirty="0"/>
+              <a:t>template&lt;</a:t>
+            </a:r>
+            <a:r>
+              <a:rPr dirty="0" err="1"/>
+              <a:t>typename</a:t>
+            </a:r>
+            <a:r>
+              <a:rPr dirty="0"/>
+              <a:t> T&gt; </a:t>
+            </a:r>
+            <a:endParaRPr lang="en-IN" dirty="0"/>
+          </a:p>
+          <a:p>
+            <a:pPr marL="0" indent="0">
+              <a:buNone/>
+            </a:pPr>
+            <a:r>
+              <a:rPr lang="en-IN" dirty="0"/>
+              <a:t>	</a:t>
+            </a:r>
+            <a:r>
+              <a:rPr dirty="0"/>
+              <a:t>T add(T a, T b) { </a:t>
+            </a:r>
+            <a:endParaRPr lang="en-IN" dirty="0"/>
+          </a:p>
+          <a:p>
+            <a:pPr marL="0" indent="0">
+              <a:buNone/>
+            </a:pPr>
+            <a:r>
+              <a:rPr lang="en-IN" dirty="0"/>
+              <a:t>		</a:t>
+            </a:r>
+            <a:r>
+              <a:rPr dirty="0"/>
+              <a:t>return a + b; </a:t>
+            </a:r>
+            <a:endParaRPr lang="en-IN" dirty="0"/>
+          </a:p>
+          <a:p>
+            <a:pPr marL="0" indent="0">
+              <a:buNone/>
+            </a:pPr>
+            <a:r>
+              <a:rPr lang="en-IN" dirty="0"/>
+              <a:t>	</a:t>
+            </a:r>
+            <a:r>
+              <a:rPr dirty="0"/>
+              <a:t>}</a:t>
+            </a:r>
+          </a:p>
+        </p:txBody>
+      </p:sp>
+      <p:pic>
+        <p:nvPicPr>
+          <p:cNvPr id="5" name="Graphic 4" descr="Programmer male with solid fill">
+            <a:extLst>
+              <a:ext uri="{FF2B5EF4-FFF2-40B4-BE49-F238E27FC236}">
+                <a16:creationId xmlns:a16="http://schemas.microsoft.com/office/drawing/2014/main" id="{921475AE-D9C9-43F4-5E90-D2F0614F3BC4}"/>
+              </a:ext>
+            </a:extLst>
+          </p:cNvPr>
+          <p:cNvPicPr>
+            <a:picLocks noChangeAspect="1"/>
+          </p:cNvPicPr>
+          <p:nvPr/>
+        </p:nvPicPr>
+        <p:blipFill>
+          <a:blip r:embed="rId2">
+            <a:extLst>
+              <a:ext uri="{96DAC541-7B7A-43D3-8B79-37D633B846F1}">
+                <asvg:svgBlip xmlns:asvg="http://schemas.microsoft.com/office/drawing/2016/SVG/main" r:embed="rId3"/>
+              </a:ext>
+            </a:extLst>
+          </a:blip>
+          <a:stretch>
+            <a:fillRect/>
+          </a:stretch>
+        </p:blipFill>
+        <p:spPr>
+          <a:xfrm>
+            <a:off x="457200" y="548265"/>
+            <a:ext cx="595746" cy="595746"/>
+          </a:xfrm>
+          <a:prstGeom prst="rect">
+            <a:avLst/>
+          </a:prstGeom>
+        </p:spPr>
+      </p:pic>
+    </p:spTree>
+  </p:cSld>
+  <p:clrMapOvr>
+    <a:masterClrMapping/>
+  </p:clrMapOvr>
+</p:sld>
+</file>
+
+<file path=ppt/slides/slide6.xml><?xml version="1.0" encoding="utf-8"?>
+<p:sld xmlns:a="http://schemas.openxmlformats.org/drawingml/2006/main" xmlns:r="http://schemas.openxmlformats.org/officeDocument/2006/relationships" xmlns:p="http://schemas.openxmlformats.org/presentationml/2006/main">
+  <p:cSld>
+    <p:spTree>
+      <p:nvGrpSpPr>
+        <p:cNvPr id="1" name=""/>
+        <p:cNvGrpSpPr/>
+        <p:nvPr/>
+      </p:nvGrpSpPr>
+      <p:grpSpPr>
+        <a:xfrm>
+          <a:off x="0" y="0"/>
+          <a:ext cx="0" cy="0"/>
+          <a:chOff x="0" y="0"/>
+          <a:chExt cx="0" cy="0"/>
+        </a:xfrm>
+      </p:grpSpPr>
+      <p:sp>
+        <p:nvSpPr>
+          <p:cNvPr id="2" name="Title 1"/>
+          <p:cNvSpPr>
+            <a:spLocks noGrp="1"/>
+          </p:cNvSpPr>
+          <p:nvPr>
+            <p:ph type="title"/>
+          </p:nvPr>
+        </p:nvSpPr>
+        <p:spPr>
+          <a:xfrm>
+            <a:off x="1052946" y="274638"/>
+            <a:ext cx="7633854" cy="1143000"/>
+          </a:xfrm>
+        </p:spPr>
+        <p:txBody>
+          <a:bodyPr>
+            <a:normAutofit/>
+          </a:bodyPr>
+          <a:lstStyle/>
+          <a:p>
+            <a:pPr algn="l"/>
+            <a:r>
+              <a:rPr dirty="0"/>
+              <a:t>Class Templates</a:t>
+            </a:r>
+          </a:p>
+        </p:txBody>
+      </p:sp>
+      <p:sp>
+        <p:nvSpPr>
+          <p:cNvPr id="3" name="Content Placeholder 2"/>
+          <p:cNvSpPr>
+            <a:spLocks noGrp="1"/>
+          </p:cNvSpPr>
+          <p:nvPr>
+            <p:ph idx="1"/>
+          </p:nvPr>
+        </p:nvSpPr>
+        <p:spPr/>
+        <p:txBody>
+          <a:bodyPr>
+            <a:normAutofit fontScale="92500" lnSpcReduction="10000"/>
+          </a:bodyPr>
+          <a:lstStyle/>
+          <a:p>
+            <a:r>
+              <a:rPr dirty="0"/>
+              <a:t>Used to define a generic class.</a:t>
+            </a:r>
+            <a:endParaRPr lang="en-IN" dirty="0"/>
+          </a:p>
+          <a:p>
+            <a:r>
+              <a:rPr lang="en-IN" dirty="0"/>
+              <a:t>useful for classes like LinkedList, </a:t>
+            </a:r>
+            <a:r>
+              <a:rPr lang="en-IN" dirty="0" err="1"/>
+              <a:t>BinaryTree</a:t>
+            </a:r>
+            <a:r>
+              <a:rPr lang="en-IN" dirty="0"/>
+              <a:t>, Stack, Queue, Array, etc.</a:t>
+            </a:r>
+            <a:endParaRPr dirty="0"/>
+          </a:p>
+          <a:p>
+            <a:endParaRPr lang="en-IN" dirty="0"/>
+          </a:p>
+          <a:p>
+            <a:r>
+              <a:rPr dirty="0"/>
+              <a:t>Example:</a:t>
+            </a:r>
+          </a:p>
+          <a:p>
+            <a:pPr marL="0" indent="0">
+              <a:buNone/>
+            </a:pPr>
+            <a:r>
+              <a:rPr lang="en-IN" dirty="0"/>
+              <a:t>	</a:t>
+            </a:r>
+            <a:r>
+              <a:rPr dirty="0"/>
+              <a:t>template&lt;typename T&gt; </a:t>
+            </a:r>
+            <a:endParaRPr lang="en-IN" dirty="0"/>
+          </a:p>
+          <a:p>
+            <a:pPr marL="0" indent="0">
+              <a:buNone/>
+            </a:pPr>
+            <a:r>
+              <a:rPr lang="en-IN" dirty="0"/>
+              <a:t>	</a:t>
+            </a:r>
+            <a:r>
+              <a:rPr dirty="0"/>
+              <a:t>class Box { </a:t>
+            </a:r>
+            <a:endParaRPr lang="en-IN" dirty="0"/>
+          </a:p>
+          <a:p>
+            <a:pPr marL="0" indent="0">
+              <a:buNone/>
+            </a:pPr>
+            <a:r>
+              <a:rPr lang="en-IN" dirty="0"/>
+              <a:t>		</a:t>
+            </a:r>
+            <a:r>
+              <a:rPr dirty="0"/>
+              <a:t>T value; </a:t>
+            </a:r>
+            <a:endParaRPr lang="en-IN" dirty="0"/>
+          </a:p>
+          <a:p>
+            <a:pPr marL="0" indent="0">
+              <a:buNone/>
+            </a:pPr>
+            <a:r>
+              <a:rPr lang="en-IN" dirty="0"/>
+              <a:t>	</a:t>
+            </a:r>
+            <a:r>
+              <a:rPr dirty="0"/>
+              <a:t>};</a:t>
+            </a:r>
+          </a:p>
+        </p:txBody>
+      </p:sp>
+      <p:pic>
+        <p:nvPicPr>
+          <p:cNvPr id="4" name="Graphic 3" descr="Programmer male with solid fill">
+            <a:extLst>
+              <a:ext uri="{FF2B5EF4-FFF2-40B4-BE49-F238E27FC236}">
+                <a16:creationId xmlns:a16="http://schemas.microsoft.com/office/drawing/2014/main" id="{717B6E49-8A59-D5F0-E092-2AE5EBC6BC8A}"/>
+              </a:ext>
+            </a:extLst>
+          </p:cNvPr>
+          <p:cNvPicPr>
+            <a:picLocks noChangeAspect="1"/>
+          </p:cNvPicPr>
+          <p:nvPr/>
+        </p:nvPicPr>
+        <p:blipFill>
+          <a:blip r:embed="rId2">
+            <a:extLst>
+              <a:ext uri="{96DAC541-7B7A-43D3-8B79-37D633B846F1}">
+                <asvg:svgBlip xmlns:asvg="http://schemas.microsoft.com/office/drawing/2016/SVG/main" r:embed="rId3"/>
+              </a:ext>
+            </a:extLst>
+          </a:blip>
+          <a:stretch>
+            <a:fillRect/>
+          </a:stretch>
+        </p:blipFill>
+        <p:spPr>
+          <a:xfrm>
+            <a:off x="457200" y="548265"/>
+            <a:ext cx="595746" cy="595746"/>
+          </a:xfrm>
+          <a:prstGeom prst="rect">
+            <a:avLst/>
+          </a:prstGeom>
+        </p:spPr>
+      </p:pic>
+    </p:spTree>
+  </p:cSld>
+  <p:clrMapOvr>
+    <a:masterClrMapping/>
+  </p:clrMapOvr>
+</p:sld>
+</file>
+
+<file path=ppt/slides/slide7.xml><?xml version="1.0" encoding="utf-8"?>
+<p:sld xmlns:a="http://schemas.openxmlformats.org/drawingml/2006/main" xmlns:r="http://schemas.openxmlformats.org/officeDocument/2006/relationships" xmlns:p="http://schemas.openxmlformats.org/presentationml/2006/main">
+  <p:cSld>
+    <p:spTree>
+      <p:nvGrpSpPr>
+        <p:cNvPr id="1" name="">
+          <a:extLst>
+            <a:ext uri="{FF2B5EF4-FFF2-40B4-BE49-F238E27FC236}">
+              <a16:creationId xmlns:a16="http://schemas.microsoft.com/office/drawing/2014/main" id="{3A8366B4-9206-BDC6-1A19-9C7CFD4B7FE1}"/>
+            </a:ext>
+          </a:extLst>
+        </p:cNvPr>
+        <p:cNvGrpSpPr/>
+        <p:nvPr/>
+      </p:nvGrpSpPr>
+      <p:grpSpPr>
+        <a:xfrm>
+          <a:off x="0" y="0"/>
+          <a:ext cx="0" cy="0"/>
+          <a:chOff x="0" y="0"/>
+          <a:chExt cx="0" cy="0"/>
+        </a:xfrm>
+      </p:grpSpPr>
+      <p:sp>
+        <p:nvSpPr>
+          <p:cNvPr id="2" name="Title 1">
+            <a:extLst>
+              <a:ext uri="{FF2B5EF4-FFF2-40B4-BE49-F238E27FC236}">
+                <a16:creationId xmlns:a16="http://schemas.microsoft.com/office/drawing/2014/main" id="{F1C0063B-D596-A31C-9854-376E56C5B568}"/>
+              </a:ext>
+            </a:extLst>
+          </p:cNvPr>
+          <p:cNvSpPr>
+            <a:spLocks noGrp="1"/>
+          </p:cNvSpPr>
+          <p:nvPr>
+            <p:ph type="title"/>
+          </p:nvPr>
+        </p:nvSpPr>
+        <p:spPr>
+          <a:xfrm>
+            <a:off x="1052946" y="274638"/>
+            <a:ext cx="7633854" cy="1143000"/>
+          </a:xfrm>
+        </p:spPr>
+        <p:txBody>
+          <a:bodyPr>
+            <a:normAutofit/>
+          </a:bodyPr>
+          <a:lstStyle/>
+          <a:p>
+            <a:pPr algn="l"/>
+            <a:r>
+              <a:rPr lang="en-IN" dirty="0"/>
+              <a:t>Variable</a:t>
+            </a:r>
+            <a:r>
+              <a:rPr dirty="0"/>
+              <a:t> Templates</a:t>
+            </a:r>
+            <a:r>
+              <a:rPr lang="en-IN" dirty="0"/>
+              <a:t> (C++14)</a:t>
+            </a:r>
+            <a:endParaRPr dirty="0"/>
+          </a:p>
+        </p:txBody>
+      </p:sp>
+      <p:sp>
+        <p:nvSpPr>
+          <p:cNvPr id="3" name="Content Placeholder 2">
+            <a:extLst>
+              <a:ext uri="{FF2B5EF4-FFF2-40B4-BE49-F238E27FC236}">
+                <a16:creationId xmlns:a16="http://schemas.microsoft.com/office/drawing/2014/main" id="{2C04D177-0944-E923-BAE7-4AF4691B6072}"/>
+              </a:ext>
+            </a:extLst>
+          </p:cNvPr>
+          <p:cNvSpPr>
+            <a:spLocks noGrp="1"/>
+          </p:cNvSpPr>
+          <p:nvPr>
+            <p:ph idx="1"/>
+          </p:nvPr>
+        </p:nvSpPr>
+        <p:spPr/>
+        <p:txBody>
+          <a:bodyPr>
+            <a:normAutofit lnSpcReduction="10000"/>
+          </a:bodyPr>
+          <a:lstStyle/>
+          <a:p>
+            <a:r>
+              <a:rPr dirty="0"/>
+              <a:t>Used to define a generic </a:t>
+            </a:r>
+            <a:r>
+              <a:rPr lang="en-IN" dirty="0"/>
+              <a:t>variable</a:t>
+            </a:r>
+            <a:r>
+              <a:rPr dirty="0"/>
+              <a:t>.</a:t>
+            </a:r>
+            <a:endParaRPr lang="en-IN" dirty="0"/>
+          </a:p>
+          <a:p>
+            <a:r>
+              <a:rPr lang="en-IN" dirty="0"/>
+              <a:t>Variable that can work with any type specified when the variable is used</a:t>
+            </a:r>
+            <a:endParaRPr dirty="0"/>
+          </a:p>
+          <a:p>
+            <a:endParaRPr lang="en-IN" dirty="0"/>
+          </a:p>
+          <a:p>
+            <a:endParaRPr lang="en-IN" dirty="0"/>
+          </a:p>
+          <a:p>
+            <a:r>
+              <a:rPr dirty="0"/>
+              <a:t>Example:</a:t>
+            </a:r>
+          </a:p>
+          <a:p>
+            <a:pPr marL="0" indent="0">
+              <a:buNone/>
+            </a:pPr>
+            <a:r>
+              <a:rPr lang="en-IN" dirty="0"/>
+              <a:t>	</a:t>
+            </a:r>
+            <a:r>
+              <a:rPr lang="fr-FR" dirty="0" err="1"/>
+              <a:t>template</a:t>
+            </a:r>
+            <a:r>
+              <a:rPr lang="fr-FR" dirty="0"/>
+              <a:t> &lt;typename T&gt; </a:t>
+            </a:r>
+          </a:p>
+          <a:p>
+            <a:pPr marL="0" indent="0">
+              <a:buNone/>
+            </a:pPr>
+            <a:r>
+              <a:rPr lang="fr-FR" dirty="0"/>
+              <a:t>	T pi = T(3.14159);</a:t>
+            </a:r>
+            <a:endParaRPr dirty="0"/>
+          </a:p>
+        </p:txBody>
+      </p:sp>
+      <p:pic>
+        <p:nvPicPr>
+          <p:cNvPr id="4" name="Graphic 3" descr="Programmer male with solid fill">
+            <a:extLst>
+              <a:ext uri="{FF2B5EF4-FFF2-40B4-BE49-F238E27FC236}">
+                <a16:creationId xmlns:a16="http://schemas.microsoft.com/office/drawing/2014/main" id="{447465A6-45BD-D2B7-AB85-8DCEB77D6900}"/>
+              </a:ext>
+            </a:extLst>
+          </p:cNvPr>
+          <p:cNvPicPr>
+            <a:picLocks noChangeAspect="1"/>
+          </p:cNvPicPr>
+          <p:nvPr/>
+        </p:nvPicPr>
+        <p:blipFill>
+          <a:blip r:embed="rId2">
+            <a:extLst>
+              <a:ext uri="{96DAC541-7B7A-43D3-8B79-37D633B846F1}">
+                <asvg:svgBlip xmlns:asvg="http://schemas.microsoft.com/office/drawing/2016/SVG/main" r:embed="rId3"/>
+              </a:ext>
+            </a:extLst>
+          </a:blip>
+          <a:stretch>
+            <a:fillRect/>
+          </a:stretch>
+        </p:blipFill>
+        <p:spPr>
+          <a:xfrm>
+            <a:off x="457200" y="548265"/>
+            <a:ext cx="595746" cy="595746"/>
+          </a:xfrm>
+          <a:prstGeom prst="rect">
+            <a:avLst/>
+          </a:prstGeom>
+        </p:spPr>
+      </p:pic>
+    </p:spTree>
+    <p:extLst>
+      <p:ext uri="{BB962C8B-B14F-4D97-AF65-F5344CB8AC3E}">
+        <p14:creationId xmlns:p14="http://schemas.microsoft.com/office/powerpoint/2010/main" val="3457027147"/>
       </p:ext>
     </p:extLst>
   </p:cSld>
@@ -6544,12 +6964,21 @@
             <p:ph type="title"/>
           </p:nvPr>
         </p:nvSpPr>
-        <p:spPr/>
-        <p:txBody>
-          <a:bodyPr/>
-          <a:lstStyle/>
-          <a:p>
-            <a:r>
+        <p:spPr>
+          <a:xfrm>
+            <a:off x="1052946" y="274638"/>
+            <a:ext cx="7633854" cy="1143000"/>
+          </a:xfrm>
+        </p:spPr>
+        <p:txBody>
+          <a:bodyPr>
+            <a:normAutofit/>
+          </a:bodyPr>
+          <a:lstStyle/>
+          <a:p>
+            <a:pPr algn="l"/>
+            <a:r>
+              <a:rPr dirty="0"/>
               <a:t>Template Specialization</a:t>
             </a:r>
           </a:p>
@@ -6586,9 +7015,9 @@
             <a:endParaRPr lang="en-IN" dirty="0"/>
           </a:p>
           <a:p>
-            <a:endParaRPr lang="en-IN" dirty="0"/>
-          </a:p>
-          <a:p>
+            <a:pPr marL="0" indent="0">
+              <a:buNone/>
+            </a:pPr>
             <a:endParaRPr lang="en-IN" dirty="0"/>
           </a:p>
           <a:p>
@@ -6628,8 +7057,8 @@
         </p:nvSpPr>
         <p:spPr>
           <a:xfrm>
-            <a:off x="2160740" y="2791109"/>
-            <a:ext cx="4572000" cy="914400"/>
+            <a:off x="1863578" y="3037464"/>
+            <a:ext cx="5416843" cy="783072"/>
           </a:xfrm>
           <a:prstGeom prst="rect">
             <a:avLst/>
@@ -6656,16 +7085,52 @@
           <a:bodyPr rtlCol="0" anchor="ctr"/>
           <a:lstStyle/>
           <a:p>
-            <a:pPr>
+            <a:pPr algn="ctr">
               <a:defRPr sz="1400"/>
             </a:pPr>
             <a:r>
-              <a:rPr dirty="0"/>
+              <a:rPr sz="1600" b="1" dirty="0"/>
               <a:t>Generic Template -&gt; Specialized Template -&gt; Custom Behavior</a:t>
             </a:r>
           </a:p>
         </p:txBody>
       </p:sp>
+      <p:pic>
+        <p:nvPicPr>
+          <p:cNvPr id="5" name="Graphic 4" descr="Programmer male with solid fill">
+            <a:extLst>
+              <a:ext uri="{FF2B5EF4-FFF2-40B4-BE49-F238E27FC236}">
+                <a16:creationId xmlns:a16="http://schemas.microsoft.com/office/drawing/2014/main" id="{27955FB7-B264-84A8-ABB0-543107F83BA1}"/>
+              </a:ext>
+            </a:extLst>
+          </p:cNvPr>
+          <p:cNvPicPr>
+            <a:picLocks noChangeAspect="1"/>
+          </p:cNvPicPr>
+          <p:nvPr/>
+        </p:nvPicPr>
+        <p:blipFill>
+          <a:blip r:embed="rId2">
+            <a:extLst>
+              <a:ext uri="{96DAC541-7B7A-43D3-8B79-37D633B846F1}">
+                <asvg:svgBlip xmlns:asvg="http://schemas.microsoft.com/office/drawing/2016/SVG/main" r:embed="rId3"/>
+              </a:ext>
+            </a:extLst>
+          </a:blip>
+          <a:stretch>
+            <a:fillRect/>
+          </a:stretch>
+        </p:blipFill>
+        <p:spPr>
+          <a:xfrm>
+            <a:off x="457200" y="548265"/>
+            <a:ext cx="595746" cy="595746"/>
+          </a:xfrm>
+          <a:prstGeom prst="rect">
+            <a:avLst/>
+          </a:prstGeom>
+        </p:spPr>
+      </p:pic>
     </p:spTree>
     <p:extLst>
       <p:ext uri="{BB962C8B-B14F-4D97-AF65-F5344CB8AC3E}">
@@ -6706,55 +7171,60 @@
             <p:ph type="title"/>
           </p:nvPr>
         </p:nvSpPr>
-        <p:spPr/>
-        <p:txBody>
-          <a:bodyPr/>
-          <a:lstStyle/>
-          <a:p>
-            <a:r>
-              <a:t>Full Template Specialization</a:t>
-            </a:r>
-          </a:p>
-        </p:txBody>
-      </p:sp>
-      <p:sp>
-        <p:nvSpPr>
-          <p:cNvPr id="3" name="Content Placeholder 2"/>
-          <p:cNvSpPr>
-            <a:spLocks noGrp="1"/>
-          </p:cNvSpPr>
-          <p:nvPr>
-            <p:ph idx="1"/>
-          </p:nvPr>
-        </p:nvSpPr>
-        <p:spPr/>
+        <p:spPr>
+          <a:xfrm>
+            <a:off x="1052946" y="274638"/>
+            <a:ext cx="7633854" cy="1143000"/>
+          </a:xfrm>
+        </p:spPr>
         <p:txBody>
           <a:bodyPr>
             <a:normAutofit/>
           </a:bodyPr>
           <a:lstStyle/>
           <a:p>
+            <a:pPr algn="l"/>
             <a:r>
               <a:rPr dirty="0"/>
-              <a:t>Full specialization customizes the template for a specific type.</a:t>
-            </a:r>
-          </a:p>
-          <a:p>
-            <a:endParaRPr dirty="0"/>
-          </a:p>
-          <a:p>
+              <a:t>Template Parameters</a:t>
+            </a:r>
+          </a:p>
+        </p:txBody>
+      </p:sp>
+      <p:sp>
+        <p:nvSpPr>
+          <p:cNvPr id="3" name="Content Placeholder 2"/>
+          <p:cNvSpPr>
+            <a:spLocks noGrp="1"/>
+          </p:cNvSpPr>
+          <p:nvPr>
+            <p:ph idx="1"/>
+          </p:nvPr>
+        </p:nvSpPr>
+        <p:spPr/>
+        <p:txBody>
+          <a:bodyPr>
+            <a:normAutofit lnSpcReduction="10000"/>
+          </a:bodyPr>
+          <a:lstStyle/>
+          <a:p>
+            <a:r>
+              <a:rPr lang="en-IN" dirty="0"/>
+              <a:t>Default</a:t>
+            </a:r>
             <a:r>
               <a:rPr dirty="0"/>
-              <a:t>Example:</a:t>
-            </a:r>
-          </a:p>
-          <a:p>
-            <a:pPr marL="457200" lvl="1" indent="0">
+              <a:t> parameters:</a:t>
+            </a:r>
+            <a:endParaRPr lang="en-IN" dirty="0"/>
+          </a:p>
+          <a:p>
+            <a:pPr marL="400050" lvl="1" indent="0">
               <a:buNone/>
             </a:pPr>
             <a:r>
               <a:rPr lang="en-IN" dirty="0"/>
-              <a:t>template&lt;&gt;</a:t>
+              <a:t>template &lt;class T1, class T2 = double&gt;</a:t>
             </a:r>
           </a:p>
           <a:p>
@@ -6763,8 +7233,22 @@
             </a:pPr>
             <a:r>
               <a:rPr lang="en-IN" dirty="0"/>
-              <a:t>	class Box &lt;int&gt; {</a:t>
-            </a:r>
+              <a:t>entity_definition</a:t>
+            </a:r>
+          </a:p>
+          <a:p>
+            <a:endParaRPr lang="en-IN" dirty="0"/>
+          </a:p>
+          <a:p>
+            <a:r>
+              <a:rPr lang="en-IN" dirty="0"/>
+              <a:t>Type &amp; </a:t>
+            </a:r>
+            <a:r>
+              <a:rPr dirty="0"/>
+              <a:t>Non-type parameters:</a:t>
+            </a:r>
+            <a:endParaRPr lang="en-IN" dirty="0"/>
           </a:p>
           <a:p>
             <a:pPr marL="400050" lvl="1" indent="0">
@@ -6772,7 +7256,7 @@
             </a:pPr>
             <a:r>
               <a:rPr lang="en-IN" dirty="0"/>
-              <a:t>    	// Specialized for pointer types</a:t>
+              <a:t>template &lt;class T, int N&gt;</a:t>
             </a:r>
           </a:p>
           <a:p>
@@ -6781,11 +7265,62 @@
             </a:pPr>
             <a:r>
               <a:rPr lang="en-IN" dirty="0"/>
-              <a:t>	};</a:t>
-            </a:r>
-          </a:p>
-        </p:txBody>
-      </p:sp>
+              <a:t>entity_definition</a:t>
+            </a:r>
+          </a:p>
+          <a:p>
+            <a:pPr marL="400050" lvl="1" indent="0">
+              <a:buNone/>
+            </a:pPr>
+            <a:endParaRPr lang="en-IN" dirty="0"/>
+          </a:p>
+          <a:p>
+            <a:pPr marL="400050" lvl="1" indent="0">
+              <a:buNone/>
+            </a:pPr>
+            <a:r>
+              <a:rPr lang="en-IN" dirty="0"/>
+              <a:t>- non-type parameters must be const</a:t>
+            </a:r>
+          </a:p>
+        </p:txBody>
+      </p:sp>
+      <p:pic>
+        <p:nvPicPr>
+          <p:cNvPr id="4" name="Graphic 3" descr="Programmer male with solid fill">
+            <a:extLst>
+              <a:ext uri="{FF2B5EF4-FFF2-40B4-BE49-F238E27FC236}">
+                <a16:creationId xmlns:a16="http://schemas.microsoft.com/office/drawing/2014/main" id="{1DB53033-EB81-7281-1380-B8EFD2ED245A}"/>
+              </a:ext>
+            </a:extLst>
+          </p:cNvPr>
+          <p:cNvPicPr>
+            <a:picLocks noChangeAspect="1"/>
+          </p:cNvPicPr>
+          <p:nvPr/>
+        </p:nvPicPr>
+        <p:blipFill>
+          <a:blip r:embed="rId2">
+            <a:extLst>
+              <a:ext uri="{96DAC541-7B7A-43D3-8B79-37D633B846F1}">
+                <asvg:svgBlip xmlns:asvg="http://schemas.microsoft.com/office/drawing/2016/SVG/main" r:embed="rId3"/>
+              </a:ext>
+            </a:extLst>
+          </a:blip>
+          <a:stretch>
+            <a:fillRect/>
+          </a:stretch>
+        </p:blipFill>
+        <p:spPr>
+          <a:xfrm>
+            <a:off x="457200" y="548265"/>
+            <a:ext cx="595746" cy="595746"/>
+          </a:xfrm>
+          <a:prstGeom prst="rect">
+            <a:avLst/>
+          </a:prstGeom>
+        </p:spPr>
+      </p:pic>
     </p:spTree>
   </p:cSld>
   <p:clrMapOvr>
